--- a/cviceni/cv2/uvin_cv2.pptx
+++ b/cviceni/cv2/uvin_cv2.pptx
@@ -372,7 +372,7 @@
             <a:pPr indent="0" algn="r">
               <a:buNone/>
             </a:pPr>
-            <a:fld id="{9EE2E0C3-73E3-4A6C-B945-65108A079ED2}" type="slidenum">
+            <a:fld id="{E486D045-1D29-42ED-BA1B-18D1927B416B}" type="slidenum">
               <a:rPr lang="en-US" sz="1400" b="0" u="none" strike="noStrike">
                 <a:solidFill>
                   <a:srgbClr val="000000"/>
@@ -430,7 +430,7 @@
         <p:spPr>
           <a:xfrm>
             <a:off x="-228600" y="1523880"/>
-            <a:ext cx="7314840" cy="4114440"/>
+            <a:ext cx="7314480" cy="4114080"/>
           </a:xfrm>
           <a:prstGeom prst="rect">
             <a:avLst/>
@@ -453,7 +453,7 @@
         <p:spPr>
           <a:xfrm>
             <a:off x="685800" y="5867280"/>
-            <a:ext cx="5486040" cy="4800240"/>
+            <a:ext cx="5485680" cy="4799880"/>
           </a:xfrm>
           <a:prstGeom prst="rect">
             <a:avLst/>
@@ -495,7 +495,7 @@
         <p:spPr>
           <a:xfrm>
             <a:off x="3884760" y="11580840"/>
-            <a:ext cx="2971440" cy="610920"/>
+            <a:ext cx="2971080" cy="610560"/>
           </a:xfrm>
           <a:prstGeom prst="rect">
             <a:avLst/>
@@ -515,6 +515,9 @@
                 <a:spcPct val="100000"/>
               </a:lnSpc>
               <a:buNone/>
+              <a:tabLst>
+                <a:tab pos="0" algn="l"/>
+              </a:tabLst>
               <a:defRPr lang="en-US" sz="1200" b="0" u="none" strike="noStrike">
                 <a:solidFill>
                   <a:schemeClr val="dk1"/>
@@ -532,8 +535,11 @@
                 <a:spcPct val="100000"/>
               </a:lnSpc>
               <a:buNone/>
-            </a:pPr>
-            <a:fld id="{E649A201-D718-486B-A5FA-780CFC3CAFDA}" type="slidenum">
+              <a:tabLst>
+                <a:tab pos="0" algn="l"/>
+              </a:tabLst>
+            </a:pPr>
+            <a:fld id="{E1EEAD33-AAF2-4192-A701-D5707015506E}" type="slidenum">
               <a:rPr lang="en-US" sz="1200" b="0" u="none" strike="noStrike">
                 <a:solidFill>
                   <a:schemeClr val="dk1"/>
@@ -543,7 +549,7 @@
                 <a:latin typeface="+mn-lt"/>
                 <a:ea typeface="+mn-ea"/>
               </a:rPr>
-              <a:t>1</a:t>
+              <a:t>&lt;number&gt;</a:t>
             </a:fld>
             <a:endParaRPr lang="en-US" sz="1200" b="0" u="none" strike="noStrike">
               <a:solidFill>
@@ -591,7 +597,7 @@
         <p:spPr>
           <a:xfrm>
             <a:off x="-228600" y="1523880"/>
-            <a:ext cx="7314840" cy="4114440"/>
+            <a:ext cx="7314480" cy="4114080"/>
           </a:xfrm>
           <a:prstGeom prst="rect">
             <a:avLst/>
@@ -614,7 +620,7 @@
         <p:spPr>
           <a:xfrm>
             <a:off x="685800" y="5867280"/>
-            <a:ext cx="5486040" cy="4800240"/>
+            <a:ext cx="5485680" cy="4799880"/>
           </a:xfrm>
           <a:prstGeom prst="rect">
             <a:avLst/>
@@ -656,7 +662,7 @@
         <p:spPr>
           <a:xfrm>
             <a:off x="3884760" y="11580840"/>
-            <a:ext cx="2971440" cy="610920"/>
+            <a:ext cx="2971080" cy="610560"/>
           </a:xfrm>
           <a:prstGeom prst="rect">
             <a:avLst/>
@@ -676,6 +682,9 @@
                 <a:spcPct val="100000"/>
               </a:lnSpc>
               <a:buNone/>
+              <a:tabLst>
+                <a:tab pos="0" algn="l"/>
+              </a:tabLst>
               <a:defRPr lang="en-US" sz="1200" b="0" u="none" strike="noStrike">
                 <a:solidFill>
                   <a:schemeClr val="dk1"/>
@@ -693,8 +702,11 @@
                 <a:spcPct val="100000"/>
               </a:lnSpc>
               <a:buNone/>
-            </a:pPr>
-            <a:fld id="{83E97554-E8BD-4D22-A9AE-4303E0D19AF1}" type="slidenum">
+              <a:tabLst>
+                <a:tab pos="0" algn="l"/>
+              </a:tabLst>
+            </a:pPr>
+            <a:fld id="{CF014154-F525-4C05-9A4F-1D82B66CE361}" type="slidenum">
               <a:rPr lang="en-US" sz="1200" b="0" u="none" strike="noStrike">
                 <a:solidFill>
                   <a:schemeClr val="dk1"/>
@@ -704,7 +716,7 @@
                 <a:latin typeface="+mn-lt"/>
                 <a:ea typeface="+mn-ea"/>
               </a:rPr>
-              <a:t>1</a:t>
+              <a:t>&lt;number&gt;</a:t>
             </a:fld>
             <a:endParaRPr lang="en-US" sz="1200" b="0" u="none" strike="noStrike">
               <a:solidFill>
@@ -752,7 +764,7 @@
         <p:spPr>
           <a:xfrm>
             <a:off x="-228600" y="1523880"/>
-            <a:ext cx="7314840" cy="4114440"/>
+            <a:ext cx="7314480" cy="4114080"/>
           </a:xfrm>
           <a:prstGeom prst="rect">
             <a:avLst/>
@@ -775,7 +787,7 @@
         <p:spPr>
           <a:xfrm>
             <a:off x="685800" y="5867280"/>
-            <a:ext cx="5486040" cy="4800240"/>
+            <a:ext cx="5485680" cy="4799880"/>
           </a:xfrm>
           <a:prstGeom prst="rect">
             <a:avLst/>
@@ -817,7 +829,7 @@
         <p:spPr>
           <a:xfrm>
             <a:off x="3884760" y="11580840"/>
-            <a:ext cx="2971440" cy="610920"/>
+            <a:ext cx="2971080" cy="610560"/>
           </a:xfrm>
           <a:prstGeom prst="rect">
             <a:avLst/>
@@ -837,6 +849,9 @@
                 <a:spcPct val="100000"/>
               </a:lnSpc>
               <a:buNone/>
+              <a:tabLst>
+                <a:tab pos="0" algn="l"/>
+              </a:tabLst>
               <a:defRPr lang="en-US" sz="1200" b="0" u="none" strike="noStrike">
                 <a:solidFill>
                   <a:schemeClr val="dk1"/>
@@ -854,8 +869,11 @@
                 <a:spcPct val="100000"/>
               </a:lnSpc>
               <a:buNone/>
-            </a:pPr>
-            <a:fld id="{E001112B-D803-4F92-8EE1-84712CDF32D0}" type="slidenum">
+              <a:tabLst>
+                <a:tab pos="0" algn="l"/>
+              </a:tabLst>
+            </a:pPr>
+            <a:fld id="{013CE2D8-E554-45FE-BB2B-5D4134F11D61}" type="slidenum">
               <a:rPr lang="en-US" sz="1200" b="0" u="none" strike="noStrike">
                 <a:solidFill>
                   <a:schemeClr val="dk1"/>
@@ -865,7 +883,7 @@
                 <a:latin typeface="+mn-lt"/>
                 <a:ea typeface="+mn-ea"/>
               </a:rPr>
-              <a:t>1</a:t>
+              <a:t>&lt;number&gt;</a:t>
             </a:fld>
             <a:endParaRPr lang="en-US" sz="1200" b="0" u="none" strike="noStrike">
               <a:solidFill>
@@ -913,7 +931,7 @@
         <p:spPr>
           <a:xfrm>
             <a:off x="-228600" y="1523880"/>
-            <a:ext cx="7314840" cy="4114440"/>
+            <a:ext cx="7314480" cy="4114080"/>
           </a:xfrm>
           <a:prstGeom prst="rect">
             <a:avLst/>
@@ -936,7 +954,7 @@
         <p:spPr>
           <a:xfrm>
             <a:off x="685800" y="5867280"/>
-            <a:ext cx="5486040" cy="4800240"/>
+            <a:ext cx="5485680" cy="4799880"/>
           </a:xfrm>
           <a:prstGeom prst="rect">
             <a:avLst/>
@@ -978,7 +996,7 @@
         <p:spPr>
           <a:xfrm>
             <a:off x="3884760" y="11580840"/>
-            <a:ext cx="2971440" cy="610920"/>
+            <a:ext cx="2971080" cy="610560"/>
           </a:xfrm>
           <a:prstGeom prst="rect">
             <a:avLst/>
@@ -998,6 +1016,9 @@
                 <a:spcPct val="100000"/>
               </a:lnSpc>
               <a:buNone/>
+              <a:tabLst>
+                <a:tab pos="0" algn="l"/>
+              </a:tabLst>
               <a:defRPr lang="en-US" sz="1200" b="0" u="none" strike="noStrike">
                 <a:solidFill>
                   <a:schemeClr val="dk1"/>
@@ -1015,8 +1036,11 @@
                 <a:spcPct val="100000"/>
               </a:lnSpc>
               <a:buNone/>
-            </a:pPr>
-            <a:fld id="{D29B7D10-503C-4DE8-A64B-EC8890507246}" type="slidenum">
+              <a:tabLst>
+                <a:tab pos="0" algn="l"/>
+              </a:tabLst>
+            </a:pPr>
+            <a:fld id="{A7A90EA3-8356-4298-99E5-522CEBD40A5D}" type="slidenum">
               <a:rPr lang="en-US" sz="1200" b="0" u="none" strike="noStrike">
                 <a:solidFill>
                   <a:schemeClr val="dk1"/>
@@ -1026,7 +1050,7 @@
                 <a:latin typeface="+mn-lt"/>
                 <a:ea typeface="+mn-ea"/>
               </a:rPr>
-              <a:t>1</a:t>
+              <a:t>&lt;number&gt;</a:t>
             </a:fld>
             <a:endParaRPr lang="en-US" sz="1200" b="0" u="none" strike="noStrike">
               <a:solidFill>
@@ -1074,7 +1098,7 @@
         <p:spPr>
           <a:xfrm>
             <a:off x="-228600" y="1523880"/>
-            <a:ext cx="7314840" cy="4114440"/>
+            <a:ext cx="7314480" cy="4114080"/>
           </a:xfrm>
           <a:prstGeom prst="rect">
             <a:avLst/>
@@ -1097,7 +1121,7 @@
         <p:spPr>
           <a:xfrm>
             <a:off x="685800" y="5867280"/>
-            <a:ext cx="5486040" cy="4800240"/>
+            <a:ext cx="5485680" cy="4799880"/>
           </a:xfrm>
           <a:prstGeom prst="rect">
             <a:avLst/>
@@ -1139,7 +1163,7 @@
         <p:spPr>
           <a:xfrm>
             <a:off x="3884760" y="11580840"/>
-            <a:ext cx="2971440" cy="610920"/>
+            <a:ext cx="2971080" cy="610560"/>
           </a:xfrm>
           <a:prstGeom prst="rect">
             <a:avLst/>
@@ -1159,6 +1183,9 @@
                 <a:spcPct val="100000"/>
               </a:lnSpc>
               <a:buNone/>
+              <a:tabLst>
+                <a:tab pos="0" algn="l"/>
+              </a:tabLst>
               <a:defRPr lang="en-US" sz="1200" b="0" u="none" strike="noStrike">
                 <a:solidFill>
                   <a:schemeClr val="dk1"/>
@@ -1176,8 +1203,11 @@
                 <a:spcPct val="100000"/>
               </a:lnSpc>
               <a:buNone/>
-            </a:pPr>
-            <a:fld id="{54F9CBAD-CA30-4125-9D32-0F5BCDBA9E1A}" type="slidenum">
+              <a:tabLst>
+                <a:tab pos="0" algn="l"/>
+              </a:tabLst>
+            </a:pPr>
+            <a:fld id="{75D827D9-A9A7-4F28-88E6-15041EBD6ADA}" type="slidenum">
               <a:rPr lang="en-US" sz="1200" b="0" u="none" strike="noStrike">
                 <a:solidFill>
                   <a:schemeClr val="dk1"/>
@@ -1187,7 +1217,7 @@
                 <a:latin typeface="+mn-lt"/>
                 <a:ea typeface="+mn-ea"/>
               </a:rPr>
-              <a:t>1</a:t>
+              <a:t>&lt;number&gt;</a:t>
             </a:fld>
             <a:endParaRPr lang="en-US" sz="1200" b="0" u="none" strike="noStrike">
               <a:solidFill>
@@ -1235,7 +1265,7 @@
         <p:spPr>
           <a:xfrm>
             <a:off x="-228600" y="1523880"/>
-            <a:ext cx="7314840" cy="4114440"/>
+            <a:ext cx="7314480" cy="4114080"/>
           </a:xfrm>
           <a:prstGeom prst="rect">
             <a:avLst/>
@@ -1258,7 +1288,7 @@
         <p:spPr>
           <a:xfrm>
             <a:off x="685800" y="5867280"/>
-            <a:ext cx="5486040" cy="4800240"/>
+            <a:ext cx="5485680" cy="4799880"/>
           </a:xfrm>
           <a:prstGeom prst="rect">
             <a:avLst/>
@@ -1300,7 +1330,7 @@
         <p:spPr>
           <a:xfrm>
             <a:off x="3884760" y="11580840"/>
-            <a:ext cx="2971440" cy="610920"/>
+            <a:ext cx="2971080" cy="610560"/>
           </a:xfrm>
           <a:prstGeom prst="rect">
             <a:avLst/>
@@ -1320,6 +1350,9 @@
                 <a:spcPct val="100000"/>
               </a:lnSpc>
               <a:buNone/>
+              <a:tabLst>
+                <a:tab pos="0" algn="l"/>
+              </a:tabLst>
               <a:defRPr lang="en-US" sz="1200" b="0" u="none" strike="noStrike">
                 <a:solidFill>
                   <a:schemeClr val="dk1"/>
@@ -1337,8 +1370,11 @@
                 <a:spcPct val="100000"/>
               </a:lnSpc>
               <a:buNone/>
-            </a:pPr>
-            <a:fld id="{44B49E6E-267B-44D2-8227-430C2AE2A244}" type="slidenum">
+              <a:tabLst>
+                <a:tab pos="0" algn="l"/>
+              </a:tabLst>
+            </a:pPr>
+            <a:fld id="{FD74F47E-5B5E-46B5-B51F-3361B624F107}" type="slidenum">
               <a:rPr lang="en-US" sz="1200" b="0" u="none" strike="noStrike">
                 <a:solidFill>
                   <a:schemeClr val="dk1"/>
@@ -1348,7 +1384,7 @@
                 <a:latin typeface="+mn-lt"/>
                 <a:ea typeface="+mn-ea"/>
               </a:rPr>
-              <a:t>1</a:t>
+              <a:t>&lt;number&gt;</a:t>
             </a:fld>
             <a:endParaRPr lang="en-US" sz="1200" b="0" u="none" strike="noStrike">
               <a:solidFill>
@@ -1396,7 +1432,7 @@
         <p:spPr>
           <a:xfrm>
             <a:off x="-228600" y="1523880"/>
-            <a:ext cx="7314840" cy="4114440"/>
+            <a:ext cx="7314480" cy="4114080"/>
           </a:xfrm>
           <a:prstGeom prst="rect">
             <a:avLst/>
@@ -1419,7 +1455,7 @@
         <p:spPr>
           <a:xfrm>
             <a:off x="685800" y="5867280"/>
-            <a:ext cx="5486040" cy="4800240"/>
+            <a:ext cx="5485680" cy="4799880"/>
           </a:xfrm>
           <a:prstGeom prst="rect">
             <a:avLst/>
@@ -1461,7 +1497,7 @@
         <p:spPr>
           <a:xfrm>
             <a:off x="3884760" y="11580840"/>
-            <a:ext cx="2971440" cy="610920"/>
+            <a:ext cx="2971080" cy="610560"/>
           </a:xfrm>
           <a:prstGeom prst="rect">
             <a:avLst/>
@@ -1481,6 +1517,9 @@
                 <a:spcPct val="100000"/>
               </a:lnSpc>
               <a:buNone/>
+              <a:tabLst>
+                <a:tab pos="0" algn="l"/>
+              </a:tabLst>
               <a:defRPr lang="en-US" sz="1200" b="0" u="none" strike="noStrike">
                 <a:solidFill>
                   <a:schemeClr val="dk1"/>
@@ -1498,8 +1537,11 @@
                 <a:spcPct val="100000"/>
               </a:lnSpc>
               <a:buNone/>
-            </a:pPr>
-            <a:fld id="{147F3392-C7B6-4AC4-9B24-DCFB30574DA1}" type="slidenum">
+              <a:tabLst>
+                <a:tab pos="0" algn="l"/>
+              </a:tabLst>
+            </a:pPr>
+            <a:fld id="{CB23DC0D-5434-46A8-BE75-6A48BDCE8B11}" type="slidenum">
               <a:rPr lang="en-US" sz="1200" b="0" u="none" strike="noStrike">
                 <a:solidFill>
                   <a:schemeClr val="dk1"/>
@@ -1509,7 +1551,7 @@
                 <a:latin typeface="+mn-lt"/>
                 <a:ea typeface="+mn-ea"/>
               </a:rPr>
-              <a:t>1</a:t>
+              <a:t>&lt;number&gt;</a:t>
             </a:fld>
             <a:endParaRPr lang="en-US" sz="1200" b="0" u="none" strike="noStrike">
               <a:solidFill>
@@ -1557,7 +1599,7 @@
         <p:spPr>
           <a:xfrm>
             <a:off x="-228600" y="1523880"/>
-            <a:ext cx="7314840" cy="4114440"/>
+            <a:ext cx="7314480" cy="4114080"/>
           </a:xfrm>
           <a:prstGeom prst="rect">
             <a:avLst/>
@@ -1580,7 +1622,7 @@
         <p:spPr>
           <a:xfrm>
             <a:off x="685800" y="5867280"/>
-            <a:ext cx="5486040" cy="4800240"/>
+            <a:ext cx="5485680" cy="4799880"/>
           </a:xfrm>
           <a:prstGeom prst="rect">
             <a:avLst/>
@@ -1622,7 +1664,7 @@
         <p:spPr>
           <a:xfrm>
             <a:off x="3884760" y="11580840"/>
-            <a:ext cx="2971440" cy="610920"/>
+            <a:ext cx="2971080" cy="610560"/>
           </a:xfrm>
           <a:prstGeom prst="rect">
             <a:avLst/>
@@ -1642,6 +1684,9 @@
                 <a:spcPct val="100000"/>
               </a:lnSpc>
               <a:buNone/>
+              <a:tabLst>
+                <a:tab pos="0" algn="l"/>
+              </a:tabLst>
               <a:defRPr lang="en-US" sz="1200" b="0" u="none" strike="noStrike">
                 <a:solidFill>
                   <a:schemeClr val="dk1"/>
@@ -1659,8 +1704,11 @@
                 <a:spcPct val="100000"/>
               </a:lnSpc>
               <a:buNone/>
-            </a:pPr>
-            <a:fld id="{507A151C-7CF5-46C0-A995-A28104146035}" type="slidenum">
+              <a:tabLst>
+                <a:tab pos="0" algn="l"/>
+              </a:tabLst>
+            </a:pPr>
+            <a:fld id="{53BBF65C-D8AA-4A46-9966-E5EBD9C158D1}" type="slidenum">
               <a:rPr lang="en-US" sz="1200" b="0" u="none" strike="noStrike">
                 <a:solidFill>
                   <a:schemeClr val="dk1"/>
@@ -1670,7 +1718,7 @@
                 <a:latin typeface="+mn-lt"/>
                 <a:ea typeface="+mn-ea"/>
               </a:rPr>
-              <a:t>1</a:t>
+              <a:t>&lt;number&gt;</a:t>
             </a:fld>
             <a:endParaRPr lang="en-US" sz="1200" b="0" u="none" strike="noStrike">
               <a:solidFill>
@@ -1718,7 +1766,7 @@
         <p:spPr>
           <a:xfrm>
             <a:off x="-228600" y="1523880"/>
-            <a:ext cx="7314840" cy="4114440"/>
+            <a:ext cx="7314480" cy="4114080"/>
           </a:xfrm>
           <a:prstGeom prst="rect">
             <a:avLst/>
@@ -1741,7 +1789,7 @@
         <p:spPr>
           <a:xfrm>
             <a:off x="685800" y="5867280"/>
-            <a:ext cx="5486040" cy="4800240"/>
+            <a:ext cx="5485680" cy="4799880"/>
           </a:xfrm>
           <a:prstGeom prst="rect">
             <a:avLst/>
@@ -1783,7 +1831,7 @@
         <p:spPr>
           <a:xfrm>
             <a:off x="3884760" y="11580840"/>
-            <a:ext cx="2971440" cy="610920"/>
+            <a:ext cx="2971080" cy="610560"/>
           </a:xfrm>
           <a:prstGeom prst="rect">
             <a:avLst/>
@@ -1803,6 +1851,9 @@
                 <a:spcPct val="100000"/>
               </a:lnSpc>
               <a:buNone/>
+              <a:tabLst>
+                <a:tab pos="0" algn="l"/>
+              </a:tabLst>
               <a:defRPr lang="en-US" sz="1200" b="0" u="none" strike="noStrike">
                 <a:solidFill>
                   <a:schemeClr val="dk1"/>
@@ -1820,8 +1871,11 @@
                 <a:spcPct val="100000"/>
               </a:lnSpc>
               <a:buNone/>
-            </a:pPr>
-            <a:fld id="{66FB5BDF-4C12-4B90-9F98-41CF25648312}" type="slidenum">
+              <a:tabLst>
+                <a:tab pos="0" algn="l"/>
+              </a:tabLst>
+            </a:pPr>
+            <a:fld id="{BBE09E4F-1455-4308-9CB1-4E087D46B877}" type="slidenum">
               <a:rPr lang="en-US" sz="1200" b="0" u="none" strike="noStrike">
                 <a:solidFill>
                   <a:schemeClr val="dk1"/>
@@ -1928,6 +1982,9 @@
           <a:lstStyle>
             <a:lvl1pPr indent="0" algn="l">
               <a:buNone/>
+              <a:tabLst>
+                <a:tab pos="0" algn="l"/>
+              </a:tabLst>
               <a:defRPr lang="en-US" sz="1800" b="0" u="none" strike="noStrike">
                 <a:solidFill>
                   <a:schemeClr val="dk1"/>
@@ -1941,6 +1998,9 @@
           <a:p>
             <a:pPr indent="0" algn="l">
               <a:buNone/>
+              <a:tabLst>
+                <a:tab pos="0" algn="l"/>
+              </a:tabLst>
             </a:pPr>
             <a:r>
               <a:rPr lang="en-US" sz="1800" b="0" u="none" strike="noStrike">
@@ -2127,7 +2187,7 @@
             </a:lvl7pPr>
           </a:lstStyle>
           <a:p>
-            <a:pPr marL="432000" indent="-324000" algn="l">
+            <a:pPr indent="-324000" algn="l">
               <a:spcBef>
                 <a:spcPts val="1417"/>
               </a:spcBef>
@@ -2394,7 +2454,7 @@
         <p:spPr>
           <a:xfrm>
             <a:off x="640080" y="1828800"/>
-            <a:ext cx="10972440" cy="731160"/>
+            <a:ext cx="10972080" cy="730800"/>
           </a:xfrm>
           <a:prstGeom prst="rect">
             <a:avLst/>
@@ -2454,7 +2514,7 @@
         <p:spPr>
           <a:xfrm>
             <a:off x="1828800" y="2926080"/>
-            <a:ext cx="8229240" cy="456840"/>
+            <a:ext cx="8228880" cy="456480"/>
           </a:xfrm>
           <a:prstGeom prst="rect">
             <a:avLst/>
@@ -2544,7 +2604,7 @@
         <p:spPr>
           <a:xfrm>
             <a:off x="457200" y="457200"/>
-            <a:ext cx="10972440" cy="360"/>
+            <a:ext cx="10972080" cy="360"/>
           </a:xfrm>
           <a:prstGeom prst="rect">
             <a:avLst/>
@@ -2604,7 +2664,7 @@
         <p:spPr>
           <a:xfrm>
             <a:off x="731520" y="1280160"/>
-            <a:ext cx="10058040" cy="1828440"/>
+            <a:ext cx="10057680" cy="1828080"/>
           </a:xfrm>
           <a:prstGeom prst="rect">
             <a:avLst/>
@@ -2664,7 +2724,7 @@
         <p:spPr>
           <a:xfrm>
             <a:off x="731520" y="4114800"/>
-            <a:ext cx="10058040" cy="360"/>
+            <a:ext cx="10057680" cy="360"/>
           </a:xfrm>
           <a:prstGeom prst="rect">
             <a:avLst/>
@@ -2754,7 +2814,7 @@
         <p:spPr>
           <a:xfrm>
             <a:off x="457200" y="457200"/>
-            <a:ext cx="10972440" cy="360"/>
+            <a:ext cx="10972080" cy="360"/>
           </a:xfrm>
           <a:prstGeom prst="rect">
             <a:avLst/>
@@ -2814,7 +2874,7 @@
         <p:spPr>
           <a:xfrm>
             <a:off x="731520" y="1280160"/>
-            <a:ext cx="10058040" cy="1828440"/>
+            <a:ext cx="10057680" cy="1828080"/>
           </a:xfrm>
           <a:prstGeom prst="rect">
             <a:avLst/>
@@ -2874,7 +2934,7 @@
         <p:spPr>
           <a:xfrm>
             <a:off x="731520" y="4114800"/>
-            <a:ext cx="10058040" cy="360"/>
+            <a:ext cx="10057680" cy="360"/>
           </a:xfrm>
           <a:prstGeom prst="rect">
             <a:avLst/>
@@ -2964,7 +3024,7 @@
         <p:spPr>
           <a:xfrm>
             <a:off x="457200" y="457200"/>
-            <a:ext cx="10972440" cy="360"/>
+            <a:ext cx="10972080" cy="360"/>
           </a:xfrm>
           <a:prstGeom prst="rect">
             <a:avLst/>
@@ -3024,7 +3084,7 @@
         <p:spPr>
           <a:xfrm>
             <a:off x="731520" y="1280160"/>
-            <a:ext cx="10058040" cy="1828440"/>
+            <a:ext cx="10057680" cy="1828080"/>
           </a:xfrm>
           <a:prstGeom prst="rect">
             <a:avLst/>
@@ -3084,7 +3144,7 @@
         <p:spPr>
           <a:xfrm>
             <a:off x="731520" y="4114800"/>
-            <a:ext cx="10058040" cy="360"/>
+            <a:ext cx="10057680" cy="360"/>
           </a:xfrm>
           <a:prstGeom prst="rect">
             <a:avLst/>
@@ -3174,7 +3234,7 @@
         <p:spPr>
           <a:xfrm>
             <a:off x="457200" y="457200"/>
-            <a:ext cx="10972440" cy="360"/>
+            <a:ext cx="10972080" cy="360"/>
           </a:xfrm>
           <a:prstGeom prst="rect">
             <a:avLst/>
@@ -3234,7 +3294,7 @@
         <p:spPr>
           <a:xfrm>
             <a:off x="731520" y="1280160"/>
-            <a:ext cx="10058040" cy="1828440"/>
+            <a:ext cx="10057680" cy="1828080"/>
           </a:xfrm>
           <a:prstGeom prst="rect">
             <a:avLst/>
@@ -3294,7 +3354,7 @@
         <p:spPr>
           <a:xfrm>
             <a:off x="731520" y="4114800"/>
-            <a:ext cx="10058040" cy="360"/>
+            <a:ext cx="10057680" cy="360"/>
           </a:xfrm>
           <a:prstGeom prst="rect">
             <a:avLst/>
@@ -3384,7 +3444,7 @@
         <p:spPr>
           <a:xfrm>
             <a:off x="457200" y="457200"/>
-            <a:ext cx="10972440" cy="360"/>
+            <a:ext cx="10972080" cy="360"/>
           </a:xfrm>
           <a:prstGeom prst="rect">
             <a:avLst/>
@@ -3444,7 +3504,7 @@
         <p:spPr>
           <a:xfrm>
             <a:off x="731520" y="1280160"/>
-            <a:ext cx="10058040" cy="1828440"/>
+            <a:ext cx="10057680" cy="1828080"/>
           </a:xfrm>
           <a:prstGeom prst="rect">
             <a:avLst/>
@@ -3609,7 +3669,7 @@
         <p:spPr>
           <a:xfrm>
             <a:off x="731520" y="4114800"/>
-            <a:ext cx="10058040" cy="360"/>
+            <a:ext cx="10057680" cy="360"/>
           </a:xfrm>
           <a:prstGeom prst="rect">
             <a:avLst/>
@@ -3699,7 +3759,7 @@
         <p:spPr>
           <a:xfrm>
             <a:off x="457200" y="457200"/>
-            <a:ext cx="10972440" cy="360"/>
+            <a:ext cx="10972080" cy="360"/>
           </a:xfrm>
           <a:prstGeom prst="rect">
             <a:avLst/>
@@ -3759,7 +3819,7 @@
         <p:spPr>
           <a:xfrm>
             <a:off x="731520" y="1280160"/>
-            <a:ext cx="10058040" cy="1828440"/>
+            <a:ext cx="10057680" cy="1828080"/>
           </a:xfrm>
           <a:prstGeom prst="rect">
             <a:avLst/>
@@ -3819,7 +3879,7 @@
         <p:spPr>
           <a:xfrm>
             <a:off x="731520" y="4114800"/>
-            <a:ext cx="10058040" cy="360"/>
+            <a:ext cx="10057680" cy="360"/>
           </a:xfrm>
           <a:prstGeom prst="rect">
             <a:avLst/>
@@ -3909,7 +3969,7 @@
         <p:spPr>
           <a:xfrm>
             <a:off x="457200" y="457200"/>
-            <a:ext cx="10972440" cy="360"/>
+            <a:ext cx="10972080" cy="360"/>
           </a:xfrm>
           <a:prstGeom prst="rect">
             <a:avLst/>
@@ -3969,7 +4029,7 @@
         <p:spPr>
           <a:xfrm>
             <a:off x="731520" y="1280160"/>
-            <a:ext cx="10058040" cy="1828440"/>
+            <a:ext cx="10057680" cy="1828080"/>
           </a:xfrm>
           <a:prstGeom prst="rect">
             <a:avLst/>
@@ -4029,7 +4089,7 @@
         <p:spPr>
           <a:xfrm>
             <a:off x="731520" y="4114800"/>
-            <a:ext cx="10058040" cy="360"/>
+            <a:ext cx="10057680" cy="360"/>
           </a:xfrm>
           <a:prstGeom prst="rect">
             <a:avLst/>
@@ -4119,7 +4179,7 @@
         <p:spPr>
           <a:xfrm>
             <a:off x="457200" y="457200"/>
-            <a:ext cx="10972440" cy="360"/>
+            <a:ext cx="10972080" cy="360"/>
           </a:xfrm>
           <a:prstGeom prst="rect">
             <a:avLst/>
@@ -4157,7 +4217,7 @@
                 <a:uFillTx/>
                 <a:latin typeface="Calibri"/>
               </a:rPr>
-              <a:t>8. Bankomat</a:t>
+              <a:t>8. Bankomat (bonus / domácí úloha)</a:t>
             </a:r>
             <a:endParaRPr lang="en-US" sz="2400" b="0" u="none" strike="noStrike">
               <a:solidFill>
@@ -4179,7 +4239,7 @@
         <p:spPr>
           <a:xfrm>
             <a:off x="731520" y="1280160"/>
-            <a:ext cx="10058040" cy="1828440"/>
+            <a:ext cx="10057680" cy="1828080"/>
           </a:xfrm>
           <a:prstGeom prst="rect">
             <a:avLst/>
@@ -4239,7 +4299,7 @@
         <p:spPr>
           <a:xfrm>
             <a:off x="731520" y="4114800"/>
-            <a:ext cx="10058040" cy="360"/>
+            <a:ext cx="10057680" cy="360"/>
           </a:xfrm>
           <a:prstGeom prst="rect">
             <a:avLst/>

--- a/cviceni/cv2/uvin_cv2.pptx
+++ b/cviceni/cv2/uvin_cv2.pptx
@@ -17,6 +17,7 @@
     <p:sldId id="262" r:id="rId10"/>
     <p:sldId id="263" r:id="rId11"/>
     <p:sldId id="264" r:id="rId12"/>
+    <p:sldId id="265" r:id="rId13"/>
   </p:sldIdLst>
   <p:sldSz cx="12192000" cy="6858000"/>
   <p:notesSz cx="6858000" cy="12192000"/>
@@ -372,7 +373,7 @@
             <a:pPr indent="0" algn="r">
               <a:buNone/>
             </a:pPr>
-            <a:fld id="{E486D045-1D29-42ED-BA1B-18D1927B416B}" type="slidenum">
+            <a:fld id="{E768FD38-21A7-4F88-815D-8C844E7B61C5}" type="slidenum">
               <a:rPr lang="en-US" sz="1400" b="0" u="none" strike="noStrike">
                 <a:solidFill>
                   <a:srgbClr val="000000"/>
@@ -419,7 +420,7 @@
       </p:grpSpPr>
       <p:sp>
         <p:nvSpPr>
-          <p:cNvPr id="36" name="PlaceHolder 1"/>
+          <p:cNvPr id="39" name="PlaceHolder 1"/>
           <p:cNvSpPr>
             <a:spLocks noGrp="1"/>
           </p:cNvSpPr>
@@ -430,19 +431,19 @@
         <p:spPr>
           <a:xfrm>
             <a:off x="-228600" y="1523880"/>
-            <a:ext cx="7314480" cy="4114080"/>
-          </a:xfrm>
-          <a:prstGeom prst="rect">
-            <a:avLst/>
-          </a:prstGeom>
-          <a:ln w="0">
-            <a:noFill/>
-          </a:ln>
-        </p:spPr>
-      </p:sp>
-      <p:sp>
-        <p:nvSpPr>
-          <p:cNvPr id="37" name="PlaceHolder 2"/>
+            <a:ext cx="7314120" cy="4113720"/>
+          </a:xfrm>
+          <a:prstGeom prst="rect">
+            <a:avLst/>
+          </a:prstGeom>
+          <a:ln w="0">
+            <a:noFill/>
+          </a:ln>
+        </p:spPr>
+      </p:sp>
+      <p:sp>
+        <p:nvSpPr>
+          <p:cNvPr id="40" name="PlaceHolder 2"/>
           <p:cNvSpPr>
             <a:spLocks noGrp="1"/>
           </p:cNvSpPr>
@@ -453,7 +454,7 @@
         <p:spPr>
           <a:xfrm>
             <a:off x="685800" y="5867280"/>
-            <a:ext cx="5485680" cy="4799880"/>
+            <a:ext cx="5485320" cy="4799520"/>
           </a:xfrm>
           <a:prstGeom prst="rect">
             <a:avLst/>
@@ -484,7 +485,7 @@
       </p:sp>
       <p:sp>
         <p:nvSpPr>
-          <p:cNvPr id="38" name="PlaceHolder 3"/>
+          <p:cNvPr id="41" name="PlaceHolder 3"/>
           <p:cNvSpPr>
             <a:spLocks noGrp="1"/>
           </p:cNvSpPr>
@@ -495,7 +496,7 @@
         <p:spPr>
           <a:xfrm>
             <a:off x="3884760" y="11580840"/>
-            <a:ext cx="2971080" cy="610560"/>
+            <a:ext cx="2970720" cy="610200"/>
           </a:xfrm>
           <a:prstGeom prst="rect">
             <a:avLst/>
@@ -539,7 +540,174 @@
                 <a:tab pos="0" algn="l"/>
               </a:tabLst>
             </a:pPr>
-            <a:fld id="{E1EEAD33-AAF2-4192-A701-D5707015506E}" type="slidenum">
+            <a:fld id="{2D028397-1152-4996-9DB8-A6D55A7C46C8}" type="slidenum">
+              <a:rPr lang="en-US" sz="1200" b="0" u="none" strike="noStrike">
+                <a:solidFill>
+                  <a:schemeClr val="dk1"/>
+                </a:solidFill>
+                <a:effectLst/>
+                <a:uFillTx/>
+                <a:latin typeface="+mn-lt"/>
+                <a:ea typeface="+mn-ea"/>
+              </a:rPr>
+              <a:t>1</a:t>
+            </a:fld>
+            <a:endParaRPr lang="en-US" sz="1200" b="0" u="none" strike="noStrike">
+              <a:solidFill>
+                <a:srgbClr val="000000"/>
+              </a:solidFill>
+              <a:effectLst/>
+              <a:uFillTx/>
+              <a:latin typeface="Times New Roman"/>
+            </a:endParaRPr>
+          </a:p>
+        </p:txBody>
+      </p:sp>
+    </p:spTree>
+  </p:cSld>
+</p:notes>
+</file>
+
+<file path=ppt/notesSlides/notesSlide10.xml><?xml version="1.0" encoding="utf-8"?>
+<p:notes xmlns:a="http://schemas.openxmlformats.org/drawingml/2006/main" xmlns:p="http://schemas.openxmlformats.org/presentationml/2006/main" xmlns:r="http://schemas.openxmlformats.org/officeDocument/2006/relationships" xmlns:p14="http://schemas.microsoft.com/office/powerpoint/2010/main" xmlns:p15="http://schemas.microsoft.com/office/powerpoint/2012/main" xmlns:mc="http://schemas.openxmlformats.org/markup-compatibility/2006">
+  <p:cSld>
+    <p:spTree>
+      <p:nvGrpSpPr>
+        <p:cNvPr id="1" name=""/>
+        <p:cNvGrpSpPr/>
+        <p:nvPr/>
+      </p:nvGrpSpPr>
+      <p:grpSpPr>
+        <a:xfrm>
+          <a:off x="0" y="0"/>
+          <a:ext cx="0" cy="0"/>
+          <a:chOff x="0" y="0"/>
+          <a:chExt cx="0" cy="0"/>
+        </a:xfrm>
+      </p:grpSpPr>
+      <p:sp>
+        <p:nvSpPr>
+          <p:cNvPr id="66" name="PlaceHolder 1"/>
+          <p:cNvSpPr>
+            <a:spLocks noGrp="1"/>
+          </p:cNvSpPr>
+          <p:nvPr>
+            <p:ph type="sldImg"/>
+          </p:nvPr>
+        </p:nvSpPr>
+        <p:spPr>
+          <a:xfrm>
+            <a:off x="-228600" y="1523880"/>
+            <a:ext cx="7314120" cy="4113720"/>
+          </a:xfrm>
+          <a:prstGeom prst="rect">
+            <a:avLst/>
+          </a:prstGeom>
+          <a:ln w="0">
+            <a:noFill/>
+          </a:ln>
+        </p:spPr>
+      </p:sp>
+      <p:sp>
+        <p:nvSpPr>
+          <p:cNvPr id="67" name="PlaceHolder 2"/>
+          <p:cNvSpPr>
+            <a:spLocks noGrp="1"/>
+          </p:cNvSpPr>
+          <p:nvPr>
+            <p:ph type="body"/>
+          </p:nvPr>
+        </p:nvSpPr>
+        <p:spPr>
+          <a:xfrm>
+            <a:off x="685800" y="5867280"/>
+            <a:ext cx="5485320" cy="4799520"/>
+          </a:xfrm>
+          <a:prstGeom prst="rect">
+            <a:avLst/>
+          </a:prstGeom>
+          <a:noFill/>
+          <a:ln w="0">
+            <a:noFill/>
+          </a:ln>
+        </p:spPr>
+        <p:txBody>
+          <a:bodyPr lIns="91440" tIns="45720" rIns="91440" bIns="45720" anchor="t">
+            <a:noAutofit/>
+          </a:bodyPr>
+          <a:p>
+            <a:pPr indent="0" algn="l">
+              <a:buNone/>
+            </a:pPr>
+            <a:endParaRPr lang="en-US" sz="1800" b="0" u="none" strike="noStrike">
+              <a:solidFill>
+                <a:srgbClr val="000000"/>
+              </a:solidFill>
+              <a:effectLst/>
+              <a:uFillTx/>
+              <a:latin typeface="Arial"/>
+            </a:endParaRPr>
+          </a:p>
+        </p:txBody>
+      </p:sp>
+      <p:sp>
+        <p:nvSpPr>
+          <p:cNvPr id="68" name="PlaceHolder 3"/>
+          <p:cNvSpPr>
+            <a:spLocks noGrp="1"/>
+          </p:cNvSpPr>
+          <p:nvPr>
+            <p:ph type="sldNum" idx="13"/>
+          </p:nvPr>
+        </p:nvSpPr>
+        <p:spPr>
+          <a:xfrm>
+            <a:off x="3884760" y="11580840"/>
+            <a:ext cx="2970720" cy="610200"/>
+          </a:xfrm>
+          <a:prstGeom prst="rect">
+            <a:avLst/>
+          </a:prstGeom>
+          <a:noFill/>
+          <a:ln w="0">
+            <a:noFill/>
+          </a:ln>
+        </p:spPr>
+        <p:txBody>
+          <a:bodyPr lIns="91440" tIns="45720" rIns="91440" bIns="45720" anchor="b">
+            <a:noAutofit/>
+          </a:bodyPr>
+          <a:lstStyle>
+            <a:lvl1pPr indent="0" algn="r" defTabSz="914400">
+              <a:lnSpc>
+                <a:spcPct val="100000"/>
+              </a:lnSpc>
+              <a:buNone/>
+              <a:tabLst>
+                <a:tab pos="0" algn="l"/>
+              </a:tabLst>
+              <a:defRPr lang="en-US" sz="1200" b="0" u="none" strike="noStrike">
+                <a:solidFill>
+                  <a:schemeClr val="dk1"/>
+                </a:solidFill>
+                <a:effectLst/>
+                <a:uFillTx/>
+                <a:latin typeface="+mn-lt"/>
+                <a:ea typeface="+mn-ea"/>
+              </a:defRPr>
+            </a:lvl1pPr>
+          </a:lstStyle>
+          <a:p>
+            <a:pPr indent="0" algn="r" defTabSz="914400">
+              <a:lnSpc>
+                <a:spcPct val="100000"/>
+              </a:lnSpc>
+              <a:buNone/>
+              <a:tabLst>
+                <a:tab pos="0" algn="l"/>
+              </a:tabLst>
+            </a:pPr>
+            <a:fld id="{0C692A1C-CCC9-4B48-91F5-EEC9594AC28A}" type="slidenum">
               <a:rPr lang="en-US" sz="1200" b="0" u="none" strike="noStrike">
                 <a:solidFill>
                   <a:schemeClr val="dk1"/>
@@ -586,7 +754,7 @@
       </p:grpSpPr>
       <p:sp>
         <p:nvSpPr>
-          <p:cNvPr id="39" name="PlaceHolder 1"/>
+          <p:cNvPr id="42" name="PlaceHolder 1"/>
           <p:cNvSpPr>
             <a:spLocks noGrp="1"/>
           </p:cNvSpPr>
@@ -597,19 +765,19 @@
         <p:spPr>
           <a:xfrm>
             <a:off x="-228600" y="1523880"/>
-            <a:ext cx="7314480" cy="4114080"/>
-          </a:xfrm>
-          <a:prstGeom prst="rect">
-            <a:avLst/>
-          </a:prstGeom>
-          <a:ln w="0">
-            <a:noFill/>
-          </a:ln>
-        </p:spPr>
-      </p:sp>
-      <p:sp>
-        <p:nvSpPr>
-          <p:cNvPr id="40" name="PlaceHolder 2"/>
+            <a:ext cx="7314120" cy="4113720"/>
+          </a:xfrm>
+          <a:prstGeom prst="rect">
+            <a:avLst/>
+          </a:prstGeom>
+          <a:ln w="0">
+            <a:noFill/>
+          </a:ln>
+        </p:spPr>
+      </p:sp>
+      <p:sp>
+        <p:nvSpPr>
+          <p:cNvPr id="43" name="PlaceHolder 2"/>
           <p:cNvSpPr>
             <a:spLocks noGrp="1"/>
           </p:cNvSpPr>
@@ -620,7 +788,7 @@
         <p:spPr>
           <a:xfrm>
             <a:off x="685800" y="5867280"/>
-            <a:ext cx="5485680" cy="4799880"/>
+            <a:ext cx="5485320" cy="4799520"/>
           </a:xfrm>
           <a:prstGeom prst="rect">
             <a:avLst/>
@@ -651,7 +819,7 @@
       </p:sp>
       <p:sp>
         <p:nvSpPr>
-          <p:cNvPr id="41" name="PlaceHolder 3"/>
+          <p:cNvPr id="44" name="PlaceHolder 3"/>
           <p:cNvSpPr>
             <a:spLocks noGrp="1"/>
           </p:cNvSpPr>
@@ -662,7 +830,7 @@
         <p:spPr>
           <a:xfrm>
             <a:off x="3884760" y="11580840"/>
-            <a:ext cx="2971080" cy="610560"/>
+            <a:ext cx="2970720" cy="610200"/>
           </a:xfrm>
           <a:prstGeom prst="rect">
             <a:avLst/>
@@ -706,7 +874,7 @@
                 <a:tab pos="0" algn="l"/>
               </a:tabLst>
             </a:pPr>
-            <a:fld id="{CF014154-F525-4C05-9A4F-1D82B66CE361}" type="slidenum">
+            <a:fld id="{3A9ACA4D-84BC-4FAB-A8DC-A943E332B24C}" type="slidenum">
               <a:rPr lang="en-US" sz="1200" b="0" u="none" strike="noStrike">
                 <a:solidFill>
                   <a:schemeClr val="dk1"/>
@@ -716,7 +884,7 @@
                 <a:latin typeface="+mn-lt"/>
                 <a:ea typeface="+mn-ea"/>
               </a:rPr>
-              <a:t>&lt;number&gt;</a:t>
+              <a:t>1</a:t>
             </a:fld>
             <a:endParaRPr lang="en-US" sz="1200" b="0" u="none" strike="noStrike">
               <a:solidFill>
@@ -753,7 +921,7 @@
       </p:grpSpPr>
       <p:sp>
         <p:nvSpPr>
-          <p:cNvPr id="42" name="PlaceHolder 1"/>
+          <p:cNvPr id="45" name="PlaceHolder 1"/>
           <p:cNvSpPr>
             <a:spLocks noGrp="1"/>
           </p:cNvSpPr>
@@ -764,19 +932,19 @@
         <p:spPr>
           <a:xfrm>
             <a:off x="-228600" y="1523880"/>
-            <a:ext cx="7314480" cy="4114080"/>
-          </a:xfrm>
-          <a:prstGeom prst="rect">
-            <a:avLst/>
-          </a:prstGeom>
-          <a:ln w="0">
-            <a:noFill/>
-          </a:ln>
-        </p:spPr>
-      </p:sp>
-      <p:sp>
-        <p:nvSpPr>
-          <p:cNvPr id="43" name="PlaceHolder 2"/>
+            <a:ext cx="7314120" cy="4113720"/>
+          </a:xfrm>
+          <a:prstGeom prst="rect">
+            <a:avLst/>
+          </a:prstGeom>
+          <a:ln w="0">
+            <a:noFill/>
+          </a:ln>
+        </p:spPr>
+      </p:sp>
+      <p:sp>
+        <p:nvSpPr>
+          <p:cNvPr id="46" name="PlaceHolder 2"/>
           <p:cNvSpPr>
             <a:spLocks noGrp="1"/>
           </p:cNvSpPr>
@@ -787,7 +955,7 @@
         <p:spPr>
           <a:xfrm>
             <a:off x="685800" y="5867280"/>
-            <a:ext cx="5485680" cy="4799880"/>
+            <a:ext cx="5485320" cy="4799520"/>
           </a:xfrm>
           <a:prstGeom prst="rect">
             <a:avLst/>
@@ -818,7 +986,7 @@
       </p:sp>
       <p:sp>
         <p:nvSpPr>
-          <p:cNvPr id="44" name="PlaceHolder 3"/>
+          <p:cNvPr id="47" name="PlaceHolder 3"/>
           <p:cNvSpPr>
             <a:spLocks noGrp="1"/>
           </p:cNvSpPr>
@@ -829,7 +997,7 @@
         <p:spPr>
           <a:xfrm>
             <a:off x="3884760" y="11580840"/>
-            <a:ext cx="2971080" cy="610560"/>
+            <a:ext cx="2970720" cy="610200"/>
           </a:xfrm>
           <a:prstGeom prst="rect">
             <a:avLst/>
@@ -873,7 +1041,7 @@
                 <a:tab pos="0" algn="l"/>
               </a:tabLst>
             </a:pPr>
-            <a:fld id="{013CE2D8-E554-45FE-BB2B-5D4134F11D61}" type="slidenum">
+            <a:fld id="{4A44AFD5-00AB-41FC-8661-78AE35113FF3}" type="slidenum">
               <a:rPr lang="en-US" sz="1200" b="0" u="none" strike="noStrike">
                 <a:solidFill>
                   <a:schemeClr val="dk1"/>
@@ -883,7 +1051,7 @@
                 <a:latin typeface="+mn-lt"/>
                 <a:ea typeface="+mn-ea"/>
               </a:rPr>
-              <a:t>&lt;number&gt;</a:t>
+              <a:t>1</a:t>
             </a:fld>
             <a:endParaRPr lang="en-US" sz="1200" b="0" u="none" strike="noStrike">
               <a:solidFill>
@@ -920,7 +1088,7 @@
       </p:grpSpPr>
       <p:sp>
         <p:nvSpPr>
-          <p:cNvPr id="45" name="PlaceHolder 1"/>
+          <p:cNvPr id="48" name="PlaceHolder 1"/>
           <p:cNvSpPr>
             <a:spLocks noGrp="1"/>
           </p:cNvSpPr>
@@ -931,19 +1099,19 @@
         <p:spPr>
           <a:xfrm>
             <a:off x="-228600" y="1523880"/>
-            <a:ext cx="7314480" cy="4114080"/>
-          </a:xfrm>
-          <a:prstGeom prst="rect">
-            <a:avLst/>
-          </a:prstGeom>
-          <a:ln w="0">
-            <a:noFill/>
-          </a:ln>
-        </p:spPr>
-      </p:sp>
-      <p:sp>
-        <p:nvSpPr>
-          <p:cNvPr id="46" name="PlaceHolder 2"/>
+            <a:ext cx="7314120" cy="4113720"/>
+          </a:xfrm>
+          <a:prstGeom prst="rect">
+            <a:avLst/>
+          </a:prstGeom>
+          <a:ln w="0">
+            <a:noFill/>
+          </a:ln>
+        </p:spPr>
+      </p:sp>
+      <p:sp>
+        <p:nvSpPr>
+          <p:cNvPr id="49" name="PlaceHolder 2"/>
           <p:cNvSpPr>
             <a:spLocks noGrp="1"/>
           </p:cNvSpPr>
@@ -954,7 +1122,7 @@
         <p:spPr>
           <a:xfrm>
             <a:off x="685800" y="5867280"/>
-            <a:ext cx="5485680" cy="4799880"/>
+            <a:ext cx="5485320" cy="4799520"/>
           </a:xfrm>
           <a:prstGeom prst="rect">
             <a:avLst/>
@@ -985,7 +1153,7 @@
       </p:sp>
       <p:sp>
         <p:nvSpPr>
-          <p:cNvPr id="47" name="PlaceHolder 3"/>
+          <p:cNvPr id="50" name="PlaceHolder 3"/>
           <p:cNvSpPr>
             <a:spLocks noGrp="1"/>
           </p:cNvSpPr>
@@ -996,7 +1164,7 @@
         <p:spPr>
           <a:xfrm>
             <a:off x="3884760" y="11580840"/>
-            <a:ext cx="2971080" cy="610560"/>
+            <a:ext cx="2970720" cy="610200"/>
           </a:xfrm>
           <a:prstGeom prst="rect">
             <a:avLst/>
@@ -1040,7 +1208,7 @@
                 <a:tab pos="0" algn="l"/>
               </a:tabLst>
             </a:pPr>
-            <a:fld id="{A7A90EA3-8356-4298-99E5-522CEBD40A5D}" type="slidenum">
+            <a:fld id="{B2FE8C22-0669-46D4-A4FA-A435B8CC3A5F}" type="slidenum">
               <a:rPr lang="en-US" sz="1200" b="0" u="none" strike="noStrike">
                 <a:solidFill>
                   <a:schemeClr val="dk1"/>
@@ -1050,7 +1218,7 @@
                 <a:latin typeface="+mn-lt"/>
                 <a:ea typeface="+mn-ea"/>
               </a:rPr>
-              <a:t>&lt;number&gt;</a:t>
+              <a:t>1</a:t>
             </a:fld>
             <a:endParaRPr lang="en-US" sz="1200" b="0" u="none" strike="noStrike">
               <a:solidFill>
@@ -1087,7 +1255,7 @@
       </p:grpSpPr>
       <p:sp>
         <p:nvSpPr>
-          <p:cNvPr id="48" name="PlaceHolder 1"/>
+          <p:cNvPr id="51" name="PlaceHolder 1"/>
           <p:cNvSpPr>
             <a:spLocks noGrp="1"/>
           </p:cNvSpPr>
@@ -1098,19 +1266,19 @@
         <p:spPr>
           <a:xfrm>
             <a:off x="-228600" y="1523880"/>
-            <a:ext cx="7314480" cy="4114080"/>
-          </a:xfrm>
-          <a:prstGeom prst="rect">
-            <a:avLst/>
-          </a:prstGeom>
-          <a:ln w="0">
-            <a:noFill/>
-          </a:ln>
-        </p:spPr>
-      </p:sp>
-      <p:sp>
-        <p:nvSpPr>
-          <p:cNvPr id="49" name="PlaceHolder 2"/>
+            <a:ext cx="7314120" cy="4113720"/>
+          </a:xfrm>
+          <a:prstGeom prst="rect">
+            <a:avLst/>
+          </a:prstGeom>
+          <a:ln w="0">
+            <a:noFill/>
+          </a:ln>
+        </p:spPr>
+      </p:sp>
+      <p:sp>
+        <p:nvSpPr>
+          <p:cNvPr id="52" name="PlaceHolder 2"/>
           <p:cNvSpPr>
             <a:spLocks noGrp="1"/>
           </p:cNvSpPr>
@@ -1121,7 +1289,7 @@
         <p:spPr>
           <a:xfrm>
             <a:off x="685800" y="5867280"/>
-            <a:ext cx="5485680" cy="4799880"/>
+            <a:ext cx="5485320" cy="4799520"/>
           </a:xfrm>
           <a:prstGeom prst="rect">
             <a:avLst/>
@@ -1152,7 +1320,7 @@
       </p:sp>
       <p:sp>
         <p:nvSpPr>
-          <p:cNvPr id="50" name="PlaceHolder 3"/>
+          <p:cNvPr id="53" name="PlaceHolder 3"/>
           <p:cNvSpPr>
             <a:spLocks noGrp="1"/>
           </p:cNvSpPr>
@@ -1163,7 +1331,7 @@
         <p:spPr>
           <a:xfrm>
             <a:off x="3884760" y="11580840"/>
-            <a:ext cx="2971080" cy="610560"/>
+            <a:ext cx="2970720" cy="610200"/>
           </a:xfrm>
           <a:prstGeom prst="rect">
             <a:avLst/>
@@ -1207,7 +1375,7 @@
                 <a:tab pos="0" algn="l"/>
               </a:tabLst>
             </a:pPr>
-            <a:fld id="{75D827D9-A9A7-4F28-88E6-15041EBD6ADA}" type="slidenum">
+            <a:fld id="{7794520D-EEBA-4057-B378-0EEC30F651D3}" type="slidenum">
               <a:rPr lang="en-US" sz="1200" b="0" u="none" strike="noStrike">
                 <a:solidFill>
                   <a:schemeClr val="dk1"/>
@@ -1217,7 +1385,7 @@
                 <a:latin typeface="+mn-lt"/>
                 <a:ea typeface="+mn-ea"/>
               </a:rPr>
-              <a:t>&lt;number&gt;</a:t>
+              <a:t>1</a:t>
             </a:fld>
             <a:endParaRPr lang="en-US" sz="1200" b="0" u="none" strike="noStrike">
               <a:solidFill>
@@ -1254,7 +1422,7 @@
       </p:grpSpPr>
       <p:sp>
         <p:nvSpPr>
-          <p:cNvPr id="51" name="PlaceHolder 1"/>
+          <p:cNvPr id="54" name="PlaceHolder 1"/>
           <p:cNvSpPr>
             <a:spLocks noGrp="1"/>
           </p:cNvSpPr>
@@ -1265,19 +1433,19 @@
         <p:spPr>
           <a:xfrm>
             <a:off x="-228600" y="1523880"/>
-            <a:ext cx="7314480" cy="4114080"/>
-          </a:xfrm>
-          <a:prstGeom prst="rect">
-            <a:avLst/>
-          </a:prstGeom>
-          <a:ln w="0">
-            <a:noFill/>
-          </a:ln>
-        </p:spPr>
-      </p:sp>
-      <p:sp>
-        <p:nvSpPr>
-          <p:cNvPr id="52" name="PlaceHolder 2"/>
+            <a:ext cx="7314120" cy="4113720"/>
+          </a:xfrm>
+          <a:prstGeom prst="rect">
+            <a:avLst/>
+          </a:prstGeom>
+          <a:ln w="0">
+            <a:noFill/>
+          </a:ln>
+        </p:spPr>
+      </p:sp>
+      <p:sp>
+        <p:nvSpPr>
+          <p:cNvPr id="55" name="PlaceHolder 2"/>
           <p:cNvSpPr>
             <a:spLocks noGrp="1"/>
           </p:cNvSpPr>
@@ -1288,7 +1456,7 @@
         <p:spPr>
           <a:xfrm>
             <a:off x="685800" y="5867280"/>
-            <a:ext cx="5485680" cy="4799880"/>
+            <a:ext cx="5485320" cy="4799520"/>
           </a:xfrm>
           <a:prstGeom prst="rect">
             <a:avLst/>
@@ -1319,7 +1487,7 @@
       </p:sp>
       <p:sp>
         <p:nvSpPr>
-          <p:cNvPr id="53" name="PlaceHolder 3"/>
+          <p:cNvPr id="56" name="PlaceHolder 3"/>
           <p:cNvSpPr>
             <a:spLocks noGrp="1"/>
           </p:cNvSpPr>
@@ -1330,7 +1498,7 @@
         <p:spPr>
           <a:xfrm>
             <a:off x="3884760" y="11580840"/>
-            <a:ext cx="2971080" cy="610560"/>
+            <a:ext cx="2970720" cy="610200"/>
           </a:xfrm>
           <a:prstGeom prst="rect">
             <a:avLst/>
@@ -1374,7 +1542,7 @@
                 <a:tab pos="0" algn="l"/>
               </a:tabLst>
             </a:pPr>
-            <a:fld id="{FD74F47E-5B5E-46B5-B51F-3361B624F107}" type="slidenum">
+            <a:fld id="{61EF30C1-D63D-43CD-9807-429434820449}" type="slidenum">
               <a:rPr lang="en-US" sz="1200" b="0" u="none" strike="noStrike">
                 <a:solidFill>
                   <a:schemeClr val="dk1"/>
@@ -1384,7 +1552,7 @@
                 <a:latin typeface="+mn-lt"/>
                 <a:ea typeface="+mn-ea"/>
               </a:rPr>
-              <a:t>&lt;number&gt;</a:t>
+              <a:t>1</a:t>
             </a:fld>
             <a:endParaRPr lang="en-US" sz="1200" b="0" u="none" strike="noStrike">
               <a:solidFill>
@@ -1421,7 +1589,7 @@
       </p:grpSpPr>
       <p:sp>
         <p:nvSpPr>
-          <p:cNvPr id="54" name="PlaceHolder 1"/>
+          <p:cNvPr id="57" name="PlaceHolder 1"/>
           <p:cNvSpPr>
             <a:spLocks noGrp="1"/>
           </p:cNvSpPr>
@@ -1432,19 +1600,19 @@
         <p:spPr>
           <a:xfrm>
             <a:off x="-228600" y="1523880"/>
-            <a:ext cx="7314480" cy="4114080"/>
-          </a:xfrm>
-          <a:prstGeom prst="rect">
-            <a:avLst/>
-          </a:prstGeom>
-          <a:ln w="0">
-            <a:noFill/>
-          </a:ln>
-        </p:spPr>
-      </p:sp>
-      <p:sp>
-        <p:nvSpPr>
-          <p:cNvPr id="55" name="PlaceHolder 2"/>
+            <a:ext cx="7314120" cy="4113720"/>
+          </a:xfrm>
+          <a:prstGeom prst="rect">
+            <a:avLst/>
+          </a:prstGeom>
+          <a:ln w="0">
+            <a:noFill/>
+          </a:ln>
+        </p:spPr>
+      </p:sp>
+      <p:sp>
+        <p:nvSpPr>
+          <p:cNvPr id="58" name="PlaceHolder 2"/>
           <p:cNvSpPr>
             <a:spLocks noGrp="1"/>
           </p:cNvSpPr>
@@ -1455,7 +1623,7 @@
         <p:spPr>
           <a:xfrm>
             <a:off x="685800" y="5867280"/>
-            <a:ext cx="5485680" cy="4799880"/>
+            <a:ext cx="5485320" cy="4799520"/>
           </a:xfrm>
           <a:prstGeom prst="rect">
             <a:avLst/>
@@ -1486,7 +1654,7 @@
       </p:sp>
       <p:sp>
         <p:nvSpPr>
-          <p:cNvPr id="56" name="PlaceHolder 3"/>
+          <p:cNvPr id="59" name="PlaceHolder 3"/>
           <p:cNvSpPr>
             <a:spLocks noGrp="1"/>
           </p:cNvSpPr>
@@ -1497,7 +1665,7 @@
         <p:spPr>
           <a:xfrm>
             <a:off x="3884760" y="11580840"/>
-            <a:ext cx="2971080" cy="610560"/>
+            <a:ext cx="2970720" cy="610200"/>
           </a:xfrm>
           <a:prstGeom prst="rect">
             <a:avLst/>
@@ -1541,7 +1709,7 @@
                 <a:tab pos="0" algn="l"/>
               </a:tabLst>
             </a:pPr>
-            <a:fld id="{CB23DC0D-5434-46A8-BE75-6A48BDCE8B11}" type="slidenum">
+            <a:fld id="{8CC44FA8-1559-498F-BC42-9D8FAE973B94}" type="slidenum">
               <a:rPr lang="en-US" sz="1200" b="0" u="none" strike="noStrike">
                 <a:solidFill>
                   <a:schemeClr val="dk1"/>
@@ -1551,7 +1719,7 @@
                 <a:latin typeface="+mn-lt"/>
                 <a:ea typeface="+mn-ea"/>
               </a:rPr>
-              <a:t>&lt;number&gt;</a:t>
+              <a:t>1</a:t>
             </a:fld>
             <a:endParaRPr lang="en-US" sz="1200" b="0" u="none" strike="noStrike">
               <a:solidFill>
@@ -1588,7 +1756,7 @@
       </p:grpSpPr>
       <p:sp>
         <p:nvSpPr>
-          <p:cNvPr id="57" name="PlaceHolder 1"/>
+          <p:cNvPr id="60" name="PlaceHolder 1"/>
           <p:cNvSpPr>
             <a:spLocks noGrp="1"/>
           </p:cNvSpPr>
@@ -1599,19 +1767,19 @@
         <p:spPr>
           <a:xfrm>
             <a:off x="-228600" y="1523880"/>
-            <a:ext cx="7314480" cy="4114080"/>
-          </a:xfrm>
-          <a:prstGeom prst="rect">
-            <a:avLst/>
-          </a:prstGeom>
-          <a:ln w="0">
-            <a:noFill/>
-          </a:ln>
-        </p:spPr>
-      </p:sp>
-      <p:sp>
-        <p:nvSpPr>
-          <p:cNvPr id="58" name="PlaceHolder 2"/>
+            <a:ext cx="7314120" cy="4113720"/>
+          </a:xfrm>
+          <a:prstGeom prst="rect">
+            <a:avLst/>
+          </a:prstGeom>
+          <a:ln w="0">
+            <a:noFill/>
+          </a:ln>
+        </p:spPr>
+      </p:sp>
+      <p:sp>
+        <p:nvSpPr>
+          <p:cNvPr id="61" name="PlaceHolder 2"/>
           <p:cNvSpPr>
             <a:spLocks noGrp="1"/>
           </p:cNvSpPr>
@@ -1622,7 +1790,7 @@
         <p:spPr>
           <a:xfrm>
             <a:off x="685800" y="5867280"/>
-            <a:ext cx="5485680" cy="4799880"/>
+            <a:ext cx="5485320" cy="4799520"/>
           </a:xfrm>
           <a:prstGeom prst="rect">
             <a:avLst/>
@@ -1653,7 +1821,7 @@
       </p:sp>
       <p:sp>
         <p:nvSpPr>
-          <p:cNvPr id="59" name="PlaceHolder 3"/>
+          <p:cNvPr id="62" name="PlaceHolder 3"/>
           <p:cNvSpPr>
             <a:spLocks noGrp="1"/>
           </p:cNvSpPr>
@@ -1664,7 +1832,7 @@
         <p:spPr>
           <a:xfrm>
             <a:off x="3884760" y="11580840"/>
-            <a:ext cx="2971080" cy="610560"/>
+            <a:ext cx="2970720" cy="610200"/>
           </a:xfrm>
           <a:prstGeom prst="rect">
             <a:avLst/>
@@ -1708,7 +1876,7 @@
                 <a:tab pos="0" algn="l"/>
               </a:tabLst>
             </a:pPr>
-            <a:fld id="{53BBF65C-D8AA-4A46-9966-E5EBD9C158D1}" type="slidenum">
+            <a:fld id="{0C162FE0-FADE-4487-BA60-0A7D9F083E75}" type="slidenum">
               <a:rPr lang="en-US" sz="1200" b="0" u="none" strike="noStrike">
                 <a:solidFill>
                   <a:schemeClr val="dk1"/>
@@ -1718,7 +1886,7 @@
                 <a:latin typeface="+mn-lt"/>
                 <a:ea typeface="+mn-ea"/>
               </a:rPr>
-              <a:t>&lt;number&gt;</a:t>
+              <a:t>1</a:t>
             </a:fld>
             <a:endParaRPr lang="en-US" sz="1200" b="0" u="none" strike="noStrike">
               <a:solidFill>
@@ -1755,7 +1923,7 @@
       </p:grpSpPr>
       <p:sp>
         <p:nvSpPr>
-          <p:cNvPr id="60" name="PlaceHolder 1"/>
+          <p:cNvPr id="63" name="PlaceHolder 1"/>
           <p:cNvSpPr>
             <a:spLocks noGrp="1"/>
           </p:cNvSpPr>
@@ -1766,19 +1934,19 @@
         <p:spPr>
           <a:xfrm>
             <a:off x="-228600" y="1523880"/>
-            <a:ext cx="7314480" cy="4114080"/>
-          </a:xfrm>
-          <a:prstGeom prst="rect">
-            <a:avLst/>
-          </a:prstGeom>
-          <a:ln w="0">
-            <a:noFill/>
-          </a:ln>
-        </p:spPr>
-      </p:sp>
-      <p:sp>
-        <p:nvSpPr>
-          <p:cNvPr id="61" name="PlaceHolder 2"/>
+            <a:ext cx="7314120" cy="4113720"/>
+          </a:xfrm>
+          <a:prstGeom prst="rect">
+            <a:avLst/>
+          </a:prstGeom>
+          <a:ln w="0">
+            <a:noFill/>
+          </a:ln>
+        </p:spPr>
+      </p:sp>
+      <p:sp>
+        <p:nvSpPr>
+          <p:cNvPr id="64" name="PlaceHolder 2"/>
           <p:cNvSpPr>
             <a:spLocks noGrp="1"/>
           </p:cNvSpPr>
@@ -1789,7 +1957,7 @@
         <p:spPr>
           <a:xfrm>
             <a:off x="685800" y="5867280"/>
-            <a:ext cx="5485680" cy="4799880"/>
+            <a:ext cx="5485320" cy="4799520"/>
           </a:xfrm>
           <a:prstGeom prst="rect">
             <a:avLst/>
@@ -1820,7 +1988,7 @@
       </p:sp>
       <p:sp>
         <p:nvSpPr>
-          <p:cNvPr id="62" name="PlaceHolder 3"/>
+          <p:cNvPr id="65" name="PlaceHolder 3"/>
           <p:cNvSpPr>
             <a:spLocks noGrp="1"/>
           </p:cNvSpPr>
@@ -1831,7 +1999,7 @@
         <p:spPr>
           <a:xfrm>
             <a:off x="3884760" y="11580840"/>
-            <a:ext cx="2971080" cy="610560"/>
+            <a:ext cx="2970720" cy="610200"/>
           </a:xfrm>
           <a:prstGeom prst="rect">
             <a:avLst/>
@@ -1875,7 +2043,7 @@
                 <a:tab pos="0" algn="l"/>
               </a:tabLst>
             </a:pPr>
-            <a:fld id="{BBE09E4F-1455-4308-9CB1-4E087D46B877}" type="slidenum">
+            <a:fld id="{EE9B0502-F389-42DD-8733-B945E729FCD5}" type="slidenum">
               <a:rPr lang="en-US" sz="1200" b="0" u="none" strike="noStrike">
                 <a:solidFill>
                   <a:schemeClr val="dk1"/>
@@ -1885,7 +2053,7 @@
                 <a:latin typeface="+mn-lt"/>
                 <a:ea typeface="+mn-ea"/>
               </a:rPr>
-              <a:t>&lt;number&gt;</a:t>
+              <a:t>1</a:t>
             </a:fld>
             <a:endParaRPr lang="en-US" sz="1200" b="0" u="none" strike="noStrike">
               <a:solidFill>
@@ -2454,7 +2622,7 @@
         <p:spPr>
           <a:xfrm>
             <a:off x="640080" y="1828800"/>
-            <a:ext cx="10972080" cy="730800"/>
+            <a:ext cx="10971720" cy="730440"/>
           </a:xfrm>
           <a:prstGeom prst="rect">
             <a:avLst/>
@@ -2514,7 +2682,7 @@
         <p:spPr>
           <a:xfrm>
             <a:off x="1828800" y="2926080"/>
-            <a:ext cx="8228880" cy="456480"/>
+            <a:ext cx="8228520" cy="456120"/>
           </a:xfrm>
           <a:prstGeom prst="rect">
             <a:avLst/>
@@ -2555,6 +2723,216 @@
               <a:t>Datové typy a vstup/výstup</a:t>
             </a:r>
             <a:endParaRPr lang="en-US" sz="1800" b="0" u="none" strike="noStrike">
+              <a:solidFill>
+                <a:srgbClr val="000000"/>
+              </a:solidFill>
+              <a:effectLst/>
+              <a:uFillTx/>
+              <a:latin typeface="Arial"/>
+            </a:endParaRPr>
+          </a:p>
+        </p:txBody>
+      </p:sp>
+    </p:spTree>
+  </p:cSld>
+  <mc:AlternateContent>
+    <mc:Choice Requires="p14">
+      <p:transition spd="slow" p14:dur="2000"/>
+    </mc:Choice>
+    <mc:Fallback>
+      <p:transition spd="slow"/>
+    </mc:Fallback>
+  </mc:AlternateContent>
+</p:sld>
+</file>
+
+<file path=ppt/slides/slide10.xml><?xml version="1.0" encoding="utf-8"?>
+<p:sld xmlns:a="http://schemas.openxmlformats.org/drawingml/2006/main" xmlns:p="http://schemas.openxmlformats.org/presentationml/2006/main" xmlns:r="http://schemas.openxmlformats.org/officeDocument/2006/relationships" xmlns:p14="http://schemas.microsoft.com/office/powerpoint/2010/main" xmlns:p15="http://schemas.microsoft.com/office/powerpoint/2012/main" xmlns:mc="http://schemas.openxmlformats.org/markup-compatibility/2006">
+  <p:cSld>
+    <p:spTree>
+      <p:nvGrpSpPr>
+        <p:cNvPr id="1" name=""/>
+        <p:cNvGrpSpPr/>
+        <p:nvPr/>
+      </p:nvGrpSpPr>
+      <p:grpSpPr>
+        <a:xfrm>
+          <a:off x="0" y="0"/>
+          <a:ext cx="0" cy="0"/>
+          <a:chOff x="0" y="0"/>
+          <a:chExt cx="0" cy="0"/>
+        </a:xfrm>
+      </p:grpSpPr>
+      <p:sp>
+        <p:nvSpPr>
+          <p:cNvPr id="36" name="Text 0"/>
+          <p:cNvSpPr/>
+          <p:nvPr/>
+        </p:nvSpPr>
+        <p:spPr>
+          <a:xfrm>
+            <a:off x="457200" y="457200"/>
+            <a:ext cx="10971720" cy="360"/>
+          </a:xfrm>
+          <a:prstGeom prst="rect">
+            <a:avLst/>
+          </a:prstGeom>
+          <a:noFill/>
+          <a:ln w="0">
+            <a:noFill/>
+          </a:ln>
+        </p:spPr>
+        <p:style>
+          <a:lnRef idx="0"/>
+          <a:fillRef idx="0"/>
+          <a:effectRef idx="0"/>
+          <a:fontRef idx="minor"/>
+        </p:style>
+        <p:txBody>
+          <a:bodyPr lIns="90000" tIns="-44280" rIns="90000" bIns="-44280" anchor="ctr">
+            <a:noAutofit/>
+          </a:bodyPr>
+          <a:p>
+            <a:pPr defTabSz="914400">
+              <a:lnSpc>
+                <a:spcPct val="100000"/>
+              </a:lnSpc>
+              <a:tabLst>
+                <a:tab pos="0" algn="l"/>
+              </a:tabLst>
+            </a:pPr>
+            <a:r>
+              <a:rPr lang="en-US" sz="2400" b="1" u="none" strike="noStrike">
+                <a:solidFill>
+                  <a:srgbClr val="000000"/>
+                </a:solidFill>
+                <a:effectLst/>
+                <a:uFillTx/>
+                <a:latin typeface="Calibri"/>
+              </a:rPr>
+              <a:t>9. Bankomat (bonus / domácí úloha)</a:t>
+            </a:r>
+            <a:endParaRPr lang="en-US" sz="2400" b="0" u="none" strike="noStrike">
+              <a:solidFill>
+                <a:srgbClr val="000000"/>
+              </a:solidFill>
+              <a:effectLst/>
+              <a:uFillTx/>
+              <a:latin typeface="Arial"/>
+            </a:endParaRPr>
+          </a:p>
+        </p:txBody>
+      </p:sp>
+      <p:sp>
+        <p:nvSpPr>
+          <p:cNvPr id="37" name="Text 1"/>
+          <p:cNvSpPr/>
+          <p:nvPr/>
+        </p:nvSpPr>
+        <p:spPr>
+          <a:xfrm>
+            <a:off x="731520" y="1280160"/>
+            <a:ext cx="10057320" cy="1827720"/>
+          </a:xfrm>
+          <a:prstGeom prst="rect">
+            <a:avLst/>
+          </a:prstGeom>
+          <a:noFill/>
+          <a:ln w="0">
+            <a:noFill/>
+          </a:ln>
+        </p:spPr>
+        <p:style>
+          <a:lnRef idx="0"/>
+          <a:fillRef idx="0"/>
+          <a:effectRef idx="0"/>
+          <a:fontRef idx="minor"/>
+        </p:style>
+        <p:txBody>
+          <a:bodyPr lIns="90000" tIns="45000" rIns="90000" bIns="45000" anchor="ctr">
+            <a:noAutofit/>
+          </a:bodyPr>
+          <a:p>
+            <a:pPr defTabSz="914400">
+              <a:lnSpc>
+                <a:spcPct val="100000"/>
+              </a:lnSpc>
+              <a:tabLst>
+                <a:tab pos="0" algn="l"/>
+              </a:tabLst>
+            </a:pPr>
+            <a:r>
+              <a:rPr lang="en-US" sz="1800" b="0" u="none" strike="noStrike">
+                <a:solidFill>
+                  <a:srgbClr val="000000"/>
+                </a:solidFill>
+                <a:effectLst/>
+                <a:uFillTx/>
+                <a:latin typeface="Calibri"/>
+              </a:rPr>
+              <a:t>Bankomat vydává bankovky 2000, 1000, 500, 200 a 100 Kč. Pro zadanou částku určete počet jednotlivých bankovek.</a:t>
+            </a:r>
+            <a:endParaRPr lang="en-US" sz="1800" b="0" u="none" strike="noStrike">
+              <a:solidFill>
+                <a:srgbClr val="000000"/>
+              </a:solidFill>
+              <a:effectLst/>
+              <a:uFillTx/>
+              <a:latin typeface="Arial"/>
+            </a:endParaRPr>
+          </a:p>
+        </p:txBody>
+      </p:sp>
+      <p:sp>
+        <p:nvSpPr>
+          <p:cNvPr id="38" name="Text 2"/>
+          <p:cNvSpPr/>
+          <p:nvPr/>
+        </p:nvSpPr>
+        <p:spPr>
+          <a:xfrm>
+            <a:off x="731520" y="4114800"/>
+            <a:ext cx="10057320" cy="360"/>
+          </a:xfrm>
+          <a:prstGeom prst="rect">
+            <a:avLst/>
+          </a:prstGeom>
+          <a:noFill/>
+          <a:ln w="0">
+            <a:noFill/>
+          </a:ln>
+        </p:spPr>
+        <p:style>
+          <a:lnRef idx="0"/>
+          <a:fillRef idx="0"/>
+          <a:effectRef idx="0"/>
+          <a:fontRef idx="minor"/>
+        </p:style>
+        <p:txBody>
+          <a:bodyPr lIns="90000" tIns="-44280" rIns="90000" bIns="-44280" anchor="ctr">
+            <a:noAutofit/>
+          </a:bodyPr>
+          <a:p>
+            <a:pPr defTabSz="914400">
+              <a:lnSpc>
+                <a:spcPct val="100000"/>
+              </a:lnSpc>
+              <a:tabLst>
+                <a:tab pos="0" algn="l"/>
+              </a:tabLst>
+            </a:pPr>
+            <a:r>
+              <a:rPr lang="en-US" sz="1600" b="0" i="1" u="none" strike="noStrike">
+                <a:solidFill>
+                  <a:srgbClr val="666666"/>
+                </a:solidFill>
+                <a:effectLst/>
+                <a:uFillTx/>
+                <a:latin typeface="Calibri"/>
+              </a:rPr>
+              <a:t>Motivace: procvičení operátorů // a %</a:t>
+            </a:r>
+            <a:endParaRPr lang="en-US" sz="1600" b="0" u="none" strike="noStrike">
               <a:solidFill>
                 <a:srgbClr val="000000"/>
               </a:solidFill>
@@ -2604,7 +2982,7 @@
         <p:spPr>
           <a:xfrm>
             <a:off x="457200" y="457200"/>
-            <a:ext cx="10972080" cy="360"/>
+            <a:ext cx="10971720" cy="360"/>
           </a:xfrm>
           <a:prstGeom prst="rect">
             <a:avLst/>
@@ -2664,7 +3042,7 @@
         <p:spPr>
           <a:xfrm>
             <a:off x="731520" y="1280160"/>
-            <a:ext cx="10057680" cy="1828080"/>
+            <a:ext cx="10057320" cy="1827720"/>
           </a:xfrm>
           <a:prstGeom prst="rect">
             <a:avLst/>
@@ -2724,7 +3102,7 @@
         <p:spPr>
           <a:xfrm>
             <a:off x="731520" y="4114800"/>
-            <a:ext cx="10057680" cy="360"/>
+            <a:ext cx="10057320" cy="360"/>
           </a:xfrm>
           <a:prstGeom prst="rect">
             <a:avLst/>
@@ -2814,7 +3192,7 @@
         <p:spPr>
           <a:xfrm>
             <a:off x="457200" y="457200"/>
-            <a:ext cx="10972080" cy="360"/>
+            <a:ext cx="10971720" cy="360"/>
           </a:xfrm>
           <a:prstGeom prst="rect">
             <a:avLst/>
@@ -2874,7 +3252,7 @@
         <p:spPr>
           <a:xfrm>
             <a:off x="731520" y="1280160"/>
-            <a:ext cx="10057680" cy="1828080"/>
+            <a:ext cx="10057320" cy="1827720"/>
           </a:xfrm>
           <a:prstGeom prst="rect">
             <a:avLst/>
@@ -2912,7 +3290,7 @@
                 <a:uFillTx/>
                 <a:latin typeface="Calibri"/>
               </a:rPr>
-              <a:t>Úhel je zadán pomocí stupňů, minut a vteřin. Převeďte jej na desetinné stupně.</a:t>
+              <a:t>Úhel je zadán pomocí stupňů, minut a vteřin (d=15, m=25, s=3.1). Převeďte jej na desetinné stupně.</a:t>
             </a:r>
             <a:endParaRPr lang="en-US" sz="1800" b="0" u="none" strike="noStrike">
               <a:solidFill>
@@ -2934,7 +3312,7 @@
         <p:spPr>
           <a:xfrm>
             <a:off x="731520" y="4114800"/>
-            <a:ext cx="10057680" cy="360"/>
+            <a:ext cx="10057320" cy="360"/>
           </a:xfrm>
           <a:prstGeom prst="rect">
             <a:avLst/>
@@ -3017,14 +3395,14 @@
       </p:grpSpPr>
       <p:sp>
         <p:nvSpPr>
-          <p:cNvPr id="18" name="Text 0"/>
+          <p:cNvPr id="18" name="Text 3"/>
           <p:cNvSpPr/>
           <p:nvPr/>
         </p:nvSpPr>
         <p:spPr>
           <a:xfrm>
             <a:off x="457200" y="457200"/>
-            <a:ext cx="10972080" cy="360"/>
+            <a:ext cx="10971720" cy="360"/>
           </a:xfrm>
           <a:prstGeom prst="rect">
             <a:avLst/>
@@ -3061,8 +3439,20 @@
                 <a:effectLst/>
                 <a:uFillTx/>
                 <a:latin typeface="Calibri"/>
-              </a:rPr>
-              <a:t>3. Skutečná vzdálenost vs. mapa</a:t>
+                <a:ea typeface="Noto Sans"/>
+              </a:rPr>
+              <a:t>3. Převod úhlu DD.DDDD → </a:t>
+            </a:r>
+            <a:r>
+              <a:rPr lang="en-US" sz="2400" b="1" u="none" strike="noStrike">
+                <a:solidFill>
+                  <a:srgbClr val="000000"/>
+                </a:solidFill>
+                <a:effectLst/>
+                <a:uFillTx/>
+                <a:latin typeface="Calibri"/>
+              </a:rPr>
+              <a:t>DMS</a:t>
             </a:r>
             <a:endParaRPr lang="en-US" sz="2400" b="0" u="none" strike="noStrike">
               <a:solidFill>
@@ -3077,14 +3467,14 @@
       </p:sp>
       <p:sp>
         <p:nvSpPr>
-          <p:cNvPr id="19" name="Text 1"/>
+          <p:cNvPr id="19" name="Text 4"/>
           <p:cNvSpPr/>
           <p:nvPr/>
         </p:nvSpPr>
         <p:spPr>
           <a:xfrm>
             <a:off x="731520" y="1280160"/>
-            <a:ext cx="10057680" cy="1828080"/>
+            <a:ext cx="10057320" cy="1827720"/>
           </a:xfrm>
           <a:prstGeom prst="rect">
             <a:avLst/>
@@ -3121,8 +3511,20 @@
                 <a:effectLst/>
                 <a:uFillTx/>
                 <a:latin typeface="Calibri"/>
-              </a:rPr>
-              <a:t>Na mapě v měřítku 1 : 25 000 je vzdálenost mezi dvěma body 7,2 cm. Určete skutečnou vzdálenost v metrech a kilometrech.</a:t>
+                <a:ea typeface="Noto Sans"/>
+              </a:rPr>
+              <a:t>Úhel je zadán ve formě desetinných stupnů (deg=31.2482551).  </a:t>
+            </a:r>
+            <a:r>
+              <a:rPr lang="en-US" sz="1800" b="0" u="none" strike="noStrike">
+                <a:solidFill>
+                  <a:srgbClr val="000000"/>
+                </a:solidFill>
+                <a:effectLst/>
+                <a:uFillTx/>
+                <a:latin typeface="Calibri"/>
+              </a:rPr>
+              <a:t>Převeďte jej na stupňě, minuty a vteřiny.</a:t>
             </a:r>
             <a:endParaRPr lang="en-US" sz="1800" b="0" u="none" strike="noStrike">
               <a:solidFill>
@@ -3137,14 +3539,14 @@
       </p:sp>
       <p:sp>
         <p:nvSpPr>
-          <p:cNvPr id="20" name="Text 2"/>
+          <p:cNvPr id="20" name="Text 5"/>
           <p:cNvSpPr/>
           <p:nvPr/>
         </p:nvSpPr>
         <p:spPr>
           <a:xfrm>
             <a:off x="731520" y="4114800"/>
-            <a:ext cx="10057680" cy="360"/>
+            <a:ext cx="10057320" cy="360"/>
           </a:xfrm>
           <a:prstGeom prst="rect">
             <a:avLst/>
@@ -3182,7 +3584,7 @@
                 <a:uFillTx/>
                 <a:latin typeface="Calibri"/>
               </a:rPr>
-              <a:t>Motivace: pochopení významu jednotlivých hodnot</a:t>
+              <a:t>Motivace: návaznost na cv. 1</a:t>
             </a:r>
             <a:endParaRPr lang="en-US" sz="1600" b="0" u="none" strike="noStrike">
               <a:solidFill>
@@ -3234,7 +3636,7 @@
         <p:spPr>
           <a:xfrm>
             <a:off x="457200" y="457200"/>
-            <a:ext cx="10972080" cy="360"/>
+            <a:ext cx="10971720" cy="360"/>
           </a:xfrm>
           <a:prstGeom prst="rect">
             <a:avLst/>
@@ -3272,7 +3674,7 @@
                 <a:uFillTx/>
                 <a:latin typeface="Calibri"/>
               </a:rPr>
-              <a:t>4. Kruh</a:t>
+              <a:t>4. Skutečná vzdálenost vs. mapa</a:t>
             </a:r>
             <a:endParaRPr lang="en-US" sz="2400" b="0" u="none" strike="noStrike">
               <a:solidFill>
@@ -3294,7 +3696,7 @@
         <p:spPr>
           <a:xfrm>
             <a:off x="731520" y="1280160"/>
-            <a:ext cx="10057680" cy="1828080"/>
+            <a:ext cx="10057320" cy="1827720"/>
           </a:xfrm>
           <a:prstGeom prst="rect">
             <a:avLst/>
@@ -3332,7 +3734,7 @@
                 <a:uFillTx/>
                 <a:latin typeface="Calibri"/>
               </a:rPr>
-              <a:t>Je dán poloměr kruhu r = 12,5 m. Vypočítejte jeho obvod a obsah.</a:t>
+              <a:t>Na mapě v měřítku 1 : 25 000 je vzdálenost mezi dvěma body 7,2 cm. Určete skutečnou vzdálenost v metrech a kilometrech.</a:t>
             </a:r>
             <a:endParaRPr lang="en-US" sz="1800" b="0" u="none" strike="noStrike">
               <a:solidFill>
@@ -3354,7 +3756,7 @@
         <p:spPr>
           <a:xfrm>
             <a:off x="731520" y="4114800"/>
-            <a:ext cx="10057680" cy="360"/>
+            <a:ext cx="10057320" cy="360"/>
           </a:xfrm>
           <a:prstGeom prst="rect">
             <a:avLst/>
@@ -3392,7 +3794,7 @@
                 <a:uFillTx/>
                 <a:latin typeface="Calibri"/>
               </a:rPr>
-              <a:t>Motivace: konstanta, reálné číslo, mocnina a závorky</a:t>
+              <a:t>Motivace: pochopení významu jednotlivých hodnot</a:t>
             </a:r>
             <a:endParaRPr lang="en-US" sz="1600" b="0" u="none" strike="noStrike">
               <a:solidFill>
@@ -3444,7 +3846,7 @@
         <p:spPr>
           <a:xfrm>
             <a:off x="457200" y="457200"/>
-            <a:ext cx="10972080" cy="360"/>
+            <a:ext cx="10971720" cy="360"/>
           </a:xfrm>
           <a:prstGeom prst="rect">
             <a:avLst/>
@@ -3482,7 +3884,7 @@
                 <a:uFillTx/>
                 <a:latin typeface="Calibri"/>
               </a:rPr>
-              <a:t>5. Malý experiment s input()</a:t>
+              <a:t>5. Kruh</a:t>
             </a:r>
             <a:endParaRPr lang="en-US" sz="2400" b="0" u="none" strike="noStrike">
               <a:solidFill>
@@ -3504,7 +3906,7 @@
         <p:spPr>
           <a:xfrm>
             <a:off x="731520" y="1280160"/>
-            <a:ext cx="10057680" cy="1828080"/>
+            <a:ext cx="10057320" cy="1827720"/>
           </a:xfrm>
           <a:prstGeom prst="rect">
             <a:avLst/>
@@ -3540,114 +3942,9 @@
                 </a:solidFill>
                 <a:effectLst/>
                 <a:uFillTx/>
-                <a:latin typeface="FreeMono"/>
-              </a:rPr>
-              <a:t>x = input("x = ")</a:t>
-            </a:r>
-            <a:endParaRPr lang="en-US" sz="1800" b="0" u="none" strike="noStrike">
-              <a:solidFill>
-                <a:srgbClr val="000000"/>
-              </a:solidFill>
-              <a:effectLst/>
-              <a:uFillTx/>
-              <a:latin typeface="Arial"/>
-            </a:endParaRPr>
-          </a:p>
-          <a:p>
-            <a:pPr defTabSz="914400">
-              <a:lnSpc>
-                <a:spcPct val="100000"/>
-              </a:lnSpc>
-              <a:tabLst>
-                <a:tab pos="0" algn="l"/>
-              </a:tabLst>
-            </a:pPr>
-            <a:r>
-              <a:rPr lang="en-US" sz="1800" b="0" u="none" strike="noStrike">
-                <a:solidFill>
-                  <a:srgbClr val="000000"/>
-                </a:solidFill>
-                <a:effectLst/>
-                <a:uFillTx/>
-                <a:latin typeface="FreeMono"/>
-              </a:rPr>
-              <a:t>y = input("y = ")</a:t>
-            </a:r>
-            <a:endParaRPr lang="en-US" sz="1800" b="0" u="none" strike="noStrike">
-              <a:solidFill>
-                <a:srgbClr val="000000"/>
-              </a:solidFill>
-              <a:effectLst/>
-              <a:uFillTx/>
-              <a:latin typeface="Arial"/>
-            </a:endParaRPr>
-          </a:p>
-          <a:p>
-            <a:pPr defTabSz="914400">
-              <a:lnSpc>
-                <a:spcPct val="100000"/>
-              </a:lnSpc>
-              <a:tabLst>
-                <a:tab pos="0" algn="l"/>
-              </a:tabLst>
-            </a:pPr>
-            <a:r>
-              <a:rPr lang="en-US" sz="1800" b="0" u="none" strike="noStrike">
-                <a:solidFill>
-                  <a:srgbClr val="000000"/>
-                </a:solidFill>
-                <a:effectLst/>
-                <a:uFillTx/>
-                <a:latin typeface="FreeMono"/>
-              </a:rPr>
-              <a:t>print(x + y)</a:t>
-            </a:r>
-            <a:endParaRPr lang="en-US" sz="1800" b="0" u="none" strike="noStrike">
-              <a:solidFill>
-                <a:srgbClr val="000000"/>
-              </a:solidFill>
-              <a:effectLst/>
-              <a:uFillTx/>
-              <a:latin typeface="Arial"/>
-            </a:endParaRPr>
-          </a:p>
-          <a:p>
-            <a:pPr defTabSz="914400">
-              <a:lnSpc>
-                <a:spcPct val="100000"/>
-              </a:lnSpc>
-              <a:tabLst>
-                <a:tab pos="0" algn="l"/>
-              </a:tabLst>
-            </a:pPr>
-            <a:endParaRPr lang="en-US" sz="1800" b="0" u="none" strike="noStrike">
-              <a:solidFill>
-                <a:srgbClr val="000000"/>
-              </a:solidFill>
-              <a:effectLst/>
-              <a:uFillTx/>
-              <a:latin typeface="Arial"/>
-            </a:endParaRPr>
-          </a:p>
-          <a:p>
-            <a:pPr defTabSz="914400">
-              <a:lnSpc>
-                <a:spcPct val="100000"/>
-              </a:lnSpc>
-              <a:tabLst>
-                <a:tab pos="0" algn="l"/>
-              </a:tabLst>
-            </a:pPr>
-            <a:r>
-              <a:rPr lang="en-US" sz="1800" b="0" u="none" strike="noStrike">
-                <a:solidFill>
-                  <a:srgbClr val="000000"/>
-                </a:solidFill>
-                <a:effectLst/>
-                <a:uFillTx/>
                 <a:latin typeface="Calibri"/>
               </a:rPr>
-              <a:t>Neopravujte program. Nejprve napište vlastní hypotézu, proč se chová právě takto.</a:t>
+              <a:t>Je dán poloměr kruhu r = 12,5 m. Vypočítejte jeho obvod a obsah.</a:t>
             </a:r>
             <a:endParaRPr lang="en-US" sz="1800" b="0" u="none" strike="noStrike">
               <a:solidFill>
@@ -3669,7 +3966,7 @@
         <p:spPr>
           <a:xfrm>
             <a:off x="731520" y="4114800"/>
-            <a:ext cx="10057680" cy="360"/>
+            <a:ext cx="10057320" cy="360"/>
           </a:xfrm>
           <a:prstGeom prst="rect">
             <a:avLst/>
@@ -3707,7 +4004,7 @@
                 <a:uFillTx/>
                 <a:latin typeface="Calibri"/>
               </a:rPr>
-              <a:t>Motivace: zjišťování datových typů pomocí type()</a:t>
+              <a:t>Motivace: konstanta, reálné číslo, mocnina a závorky</a:t>
             </a:r>
             <a:endParaRPr lang="en-US" sz="1600" b="0" u="none" strike="noStrike">
               <a:solidFill>
@@ -3759,7 +4056,7 @@
         <p:spPr>
           <a:xfrm>
             <a:off x="457200" y="457200"/>
-            <a:ext cx="10972080" cy="360"/>
+            <a:ext cx="10971720" cy="360"/>
           </a:xfrm>
           <a:prstGeom prst="rect">
             <a:avLst/>
@@ -3797,7 +4094,7 @@
                 <a:uFillTx/>
                 <a:latin typeface="Calibri"/>
               </a:rPr>
-              <a:t>6. AI až úplně na závěr</a:t>
+              <a:t>6. Malý experiment s input()</a:t>
             </a:r>
             <a:endParaRPr lang="en-US" sz="2400" b="0" u="none" strike="noStrike">
               <a:solidFill>
@@ -3819,7 +4116,7 @@
         <p:spPr>
           <a:xfrm>
             <a:off x="731520" y="1280160"/>
-            <a:ext cx="10057680" cy="1828080"/>
+            <a:ext cx="10057320" cy="1827720"/>
           </a:xfrm>
           <a:prstGeom prst="rect">
             <a:avLst/>
@@ -3855,9 +4152,114 @@
                 </a:solidFill>
                 <a:effectLst/>
                 <a:uFillTx/>
+                <a:latin typeface="FreeMono"/>
+              </a:rPr>
+              <a:t>x = input("x = ")</a:t>
+            </a:r>
+            <a:endParaRPr lang="en-US" sz="1800" b="0" u="none" strike="noStrike">
+              <a:solidFill>
+                <a:srgbClr val="000000"/>
+              </a:solidFill>
+              <a:effectLst/>
+              <a:uFillTx/>
+              <a:latin typeface="Arial"/>
+            </a:endParaRPr>
+          </a:p>
+          <a:p>
+            <a:pPr defTabSz="914400">
+              <a:lnSpc>
+                <a:spcPct val="100000"/>
+              </a:lnSpc>
+              <a:tabLst>
+                <a:tab pos="0" algn="l"/>
+              </a:tabLst>
+            </a:pPr>
+            <a:r>
+              <a:rPr lang="en-US" sz="1800" b="0" u="none" strike="noStrike">
+                <a:solidFill>
+                  <a:srgbClr val="000000"/>
+                </a:solidFill>
+                <a:effectLst/>
+                <a:uFillTx/>
+                <a:latin typeface="FreeMono"/>
+              </a:rPr>
+              <a:t>y = input("y = ")</a:t>
+            </a:r>
+            <a:endParaRPr lang="en-US" sz="1800" b="0" u="none" strike="noStrike">
+              <a:solidFill>
+                <a:srgbClr val="000000"/>
+              </a:solidFill>
+              <a:effectLst/>
+              <a:uFillTx/>
+              <a:latin typeface="Arial"/>
+            </a:endParaRPr>
+          </a:p>
+          <a:p>
+            <a:pPr defTabSz="914400">
+              <a:lnSpc>
+                <a:spcPct val="100000"/>
+              </a:lnSpc>
+              <a:tabLst>
+                <a:tab pos="0" algn="l"/>
+              </a:tabLst>
+            </a:pPr>
+            <a:r>
+              <a:rPr lang="en-US" sz="1800" b="0" u="none" strike="noStrike">
+                <a:solidFill>
+                  <a:srgbClr val="000000"/>
+                </a:solidFill>
+                <a:effectLst/>
+                <a:uFillTx/>
+                <a:latin typeface="FreeMono"/>
+              </a:rPr>
+              <a:t>print(x + y)</a:t>
+            </a:r>
+            <a:endParaRPr lang="en-US" sz="1800" b="0" u="none" strike="noStrike">
+              <a:solidFill>
+                <a:srgbClr val="000000"/>
+              </a:solidFill>
+              <a:effectLst/>
+              <a:uFillTx/>
+              <a:latin typeface="Arial"/>
+            </a:endParaRPr>
+          </a:p>
+          <a:p>
+            <a:pPr defTabSz="914400">
+              <a:lnSpc>
+                <a:spcPct val="100000"/>
+              </a:lnSpc>
+              <a:tabLst>
+                <a:tab pos="0" algn="l"/>
+              </a:tabLst>
+            </a:pPr>
+            <a:endParaRPr lang="en-US" sz="1800" b="0" u="none" strike="noStrike">
+              <a:solidFill>
+                <a:srgbClr val="000000"/>
+              </a:solidFill>
+              <a:effectLst/>
+              <a:uFillTx/>
+              <a:latin typeface="Arial"/>
+            </a:endParaRPr>
+          </a:p>
+          <a:p>
+            <a:pPr defTabSz="914400">
+              <a:lnSpc>
+                <a:spcPct val="100000"/>
+              </a:lnSpc>
+              <a:tabLst>
+                <a:tab pos="0" algn="l"/>
+              </a:tabLst>
+            </a:pPr>
+            <a:r>
+              <a:rPr lang="en-US" sz="1800" b="0" u="none" strike="noStrike">
+                <a:solidFill>
+                  <a:srgbClr val="000000"/>
+                </a:solidFill>
+                <a:effectLst/>
+                <a:uFillTx/>
                 <a:latin typeface="Calibri"/>
               </a:rPr>
-              <a:t>Program z předchozího bodu se nechová podle očekávání. Napište hypotézu, navrhněte opravu, vyzkoušejte ji a teprve potom porovnejte s AI.</a:t>
+              <a:t>Neopravujte program. Nejprve napište vlastní hypotézu, proč se chová právě takto.</a:t>
             </a:r>
             <a:endParaRPr lang="en-US" sz="1800" b="0" u="none" strike="noStrike">
               <a:solidFill>
@@ -3879,7 +4281,7 @@
         <p:spPr>
           <a:xfrm>
             <a:off x="731520" y="4114800"/>
-            <a:ext cx="10057680" cy="360"/>
+            <a:ext cx="10057320" cy="360"/>
           </a:xfrm>
           <a:prstGeom prst="rect">
             <a:avLst/>
@@ -3917,7 +4319,7 @@
                 <a:uFillTx/>
                 <a:latin typeface="Calibri"/>
               </a:rPr>
-              <a:t>Motivace: postup programátora při řešení problému</a:t>
+              <a:t>Motivace: zjišťování datových typů pomocí type()</a:t>
             </a:r>
             <a:endParaRPr lang="en-US" sz="1600" b="0" u="none" strike="noStrike">
               <a:solidFill>
@@ -3969,7 +4371,7 @@
         <p:spPr>
           <a:xfrm>
             <a:off x="457200" y="457200"/>
-            <a:ext cx="10972080" cy="360"/>
+            <a:ext cx="10971720" cy="360"/>
           </a:xfrm>
           <a:prstGeom prst="rect">
             <a:avLst/>
@@ -4007,7 +4409,7 @@
                 <a:uFillTx/>
                 <a:latin typeface="Calibri"/>
               </a:rPr>
-              <a:t>7. Převod °C na °F</a:t>
+              <a:t>7. AI až úplně na závěr</a:t>
             </a:r>
             <a:endParaRPr lang="en-US" sz="2400" b="0" u="none" strike="noStrike">
               <a:solidFill>
@@ -4029,7 +4431,7 @@
         <p:spPr>
           <a:xfrm>
             <a:off x="731520" y="1280160"/>
-            <a:ext cx="10057680" cy="1828080"/>
+            <a:ext cx="10057320" cy="1827720"/>
           </a:xfrm>
           <a:prstGeom prst="rect">
             <a:avLst/>
@@ -4067,7 +4469,7 @@
                 <a:uFillTx/>
                 <a:latin typeface="Calibri"/>
               </a:rPr>
-              <a:t>Uživatel zadá teplotu ve °C. Převeďte ji na °F.</a:t>
+              <a:t>Program z předchozího bodu se nechová podle očekávání. Napište hypotézu, navrhněte opravu, vyzkoušejte ji a teprve potom porovnejte s AI.</a:t>
             </a:r>
             <a:endParaRPr lang="en-US" sz="1800" b="0" u="none" strike="noStrike">
               <a:solidFill>
@@ -4089,7 +4491,7 @@
         <p:spPr>
           <a:xfrm>
             <a:off x="731520" y="4114800"/>
-            <a:ext cx="10057680" cy="360"/>
+            <a:ext cx="10057320" cy="360"/>
           </a:xfrm>
           <a:prstGeom prst="rect">
             <a:avLst/>
@@ -4127,7 +4529,7 @@
                 <a:uFillTx/>
                 <a:latin typeface="Calibri"/>
               </a:rPr>
-              <a:t>Motivace: praktická aplikace práce s interaktivním vstupem a reálnými čísly</a:t>
+              <a:t>Motivace: postup programátora při řešení problému</a:t>
             </a:r>
             <a:endParaRPr lang="en-US" sz="1600" b="0" u="none" strike="noStrike">
               <a:solidFill>
@@ -4179,7 +4581,7 @@
         <p:spPr>
           <a:xfrm>
             <a:off x="457200" y="457200"/>
-            <a:ext cx="10972080" cy="360"/>
+            <a:ext cx="10971720" cy="360"/>
           </a:xfrm>
           <a:prstGeom prst="rect">
             <a:avLst/>
@@ -4217,7 +4619,7 @@
                 <a:uFillTx/>
                 <a:latin typeface="Calibri"/>
               </a:rPr>
-              <a:t>8. Bankomat (bonus / domácí úloha)</a:t>
+              <a:t>8. Převod °C na °F</a:t>
             </a:r>
             <a:endParaRPr lang="en-US" sz="2400" b="0" u="none" strike="noStrike">
               <a:solidFill>
@@ -4239,7 +4641,7 @@
         <p:spPr>
           <a:xfrm>
             <a:off x="731520" y="1280160"/>
-            <a:ext cx="10057680" cy="1828080"/>
+            <a:ext cx="10057320" cy="1827720"/>
           </a:xfrm>
           <a:prstGeom prst="rect">
             <a:avLst/>
@@ -4277,7 +4679,7 @@
                 <a:uFillTx/>
                 <a:latin typeface="Calibri"/>
               </a:rPr>
-              <a:t>Bankomat vydává bankovky 2000, 1000, 500, 200 a 100 Kč. Pro zadanou částku určete počet jednotlivých bankovek.</a:t>
+              <a:t>Uživatel zadá teplotu ve °C. Převeďte ji na °F.</a:t>
             </a:r>
             <a:endParaRPr lang="en-US" sz="1800" b="0" u="none" strike="noStrike">
               <a:solidFill>
@@ -4299,7 +4701,7 @@
         <p:spPr>
           <a:xfrm>
             <a:off x="731520" y="4114800"/>
-            <a:ext cx="10057680" cy="360"/>
+            <a:ext cx="10057320" cy="360"/>
           </a:xfrm>
           <a:prstGeom prst="rect">
             <a:avLst/>
@@ -4337,7 +4739,7 @@
                 <a:uFillTx/>
                 <a:latin typeface="Calibri"/>
               </a:rPr>
-              <a:t>Motivace: procvičení operátorů // a %</a:t>
+              <a:t>Motivace: praktická aplikace práce s interaktivním vstupem a reálnými čísly</a:t>
             </a:r>
             <a:endParaRPr lang="en-US" sz="1600" b="0" u="none" strike="noStrike">
               <a:solidFill>
